--- a/05. Implementação Prática e Coding suportado por IA_Éder/Claude Code no VS Code do primeiro contato a uma análise reproduzível_FIT796.pptx
+++ b/05. Implementação Prática e Coding suportado por IA_Éder/Claude Code no VS Code do primeiro contato a uma análise reproduzível_FIT796.pptx
@@ -192,8 +192,7 @@
 <file path=ppt/revisionInfo.xml><?xml version="1.0" encoding="utf-8"?>
 <p1510:revInfo xmlns:a="http://schemas.openxmlformats.org/drawingml/2006/main" xmlns:r="http://schemas.openxmlformats.org/officeDocument/2006/relationships" xmlns:p1510="http://schemas.microsoft.com/office/powerpoint/2015/10/main">
   <p1510:revLst>
-    <p1510:client id="{DE81C722-DEF5-4515-B241-02C8EC56E218}" v="11" dt="2026-10-27T20:00:16.362"/>
-    <p1510:client id="{E45A2DEC-2261-48AF-B4A8-7B10B1CC645D}" v="1" dt="2026-10-27T15:45:50.880"/>
+    <p1510:client id="{DE81C722-DEF5-4515-B241-02C8EC56E218}" v="233" dt="2026-10-30T20:26:45.055"/>
   </p1510:revLst>
 </p1510:revInfo>
 </file>
@@ -203,10 +202,79 @@
   <pc:docChgLst>
     <pc:chgData name="Eder Silva" userId="9b7f41b4-798d-40cf-8f87-8e33ae7a0417" providerId="ADAL" clId="{DFF9E84E-5922-4F26-9EAD-8AB4E668133E}"/>
     <pc:docChg chg="custSel modSld">
-      <pc:chgData name="Eder Silva" userId="9b7f41b4-798d-40cf-8f87-8e33ae7a0417" providerId="ADAL" clId="{DFF9E84E-5922-4F26-9EAD-8AB4E668133E}" dt="2026-10-27T20:00:16.362" v="38"/>
+      <pc:chgData name="Eder Silva" userId="9b7f41b4-798d-40cf-8f87-8e33ae7a0417" providerId="ADAL" clId="{DFF9E84E-5922-4F26-9EAD-8AB4E668133E}" dt="2026-10-30T20:26:49.955" v="524" actId="1076"/>
       <pc:docMkLst>
         <pc:docMk/>
       </pc:docMkLst>
+      <pc:sldChg chg="modSp mod">
+        <pc:chgData name="Eder Silva" userId="9b7f41b4-798d-40cf-8f87-8e33ae7a0417" providerId="ADAL" clId="{DFF9E84E-5922-4F26-9EAD-8AB4E668133E}" dt="2026-10-30T20:23:11.542" v="63" actId="1037"/>
+        <pc:sldMkLst>
+          <pc:docMk/>
+          <pc:sldMk cId="2435617675" sldId="337"/>
+        </pc:sldMkLst>
+        <pc:spChg chg="mod">
+          <ac:chgData name="Eder Silva" userId="9b7f41b4-798d-40cf-8f87-8e33ae7a0417" providerId="ADAL" clId="{DFF9E84E-5922-4F26-9EAD-8AB4E668133E}" dt="2026-10-30T20:23:11.542" v="63" actId="1037"/>
+          <ac:spMkLst>
+            <pc:docMk/>
+            <pc:sldMk cId="2435617675" sldId="337"/>
+            <ac:spMk id="2" creationId="{00000000-0000-0000-0000-000000000000}"/>
+          </ac:spMkLst>
+        </pc:spChg>
+      </pc:sldChg>
+      <pc:sldChg chg="modSp mod">
+        <pc:chgData name="Eder Silva" userId="9b7f41b4-798d-40cf-8f87-8e33ae7a0417" providerId="ADAL" clId="{DFF9E84E-5922-4F26-9EAD-8AB4E668133E}" dt="2026-10-30T20:23:22.552" v="64" actId="1076"/>
+        <pc:sldMkLst>
+          <pc:docMk/>
+          <pc:sldMk cId="2490171675" sldId="343"/>
+        </pc:sldMkLst>
+        <pc:spChg chg="mod">
+          <ac:chgData name="Eder Silva" userId="9b7f41b4-798d-40cf-8f87-8e33ae7a0417" providerId="ADAL" clId="{DFF9E84E-5922-4F26-9EAD-8AB4E668133E}" dt="2026-10-30T20:23:22.552" v="64" actId="1076"/>
+          <ac:spMkLst>
+            <pc:docMk/>
+            <pc:sldMk cId="2490171675" sldId="343"/>
+            <ac:spMk id="2" creationId="{00000000-0000-0000-0000-000000000000}"/>
+          </ac:spMkLst>
+        </pc:spChg>
+      </pc:sldChg>
+      <pc:sldChg chg="modSp mod">
+        <pc:chgData name="Eder Silva" userId="9b7f41b4-798d-40cf-8f87-8e33ae7a0417" providerId="ADAL" clId="{DFF9E84E-5922-4F26-9EAD-8AB4E668133E}" dt="2026-10-30T20:23:36.772" v="91" actId="1076"/>
+        <pc:sldMkLst>
+          <pc:docMk/>
+          <pc:sldMk cId="2880897053" sldId="346"/>
+        </pc:sldMkLst>
+        <pc:spChg chg="mod">
+          <ac:chgData name="Eder Silva" userId="9b7f41b4-798d-40cf-8f87-8e33ae7a0417" providerId="ADAL" clId="{DFF9E84E-5922-4F26-9EAD-8AB4E668133E}" dt="2026-10-30T20:23:36.772" v="91" actId="1076"/>
+          <ac:spMkLst>
+            <pc:docMk/>
+            <pc:sldMk cId="2880897053" sldId="346"/>
+            <ac:spMk id="13" creationId="{ED56A3BD-054F-F5EA-EC60-54D014237B8F}"/>
+          </ac:spMkLst>
+        </pc:spChg>
+        <pc:spChg chg="mod">
+          <ac:chgData name="Eder Silva" userId="9b7f41b4-798d-40cf-8f87-8e33ae7a0417" providerId="ADAL" clId="{DFF9E84E-5922-4F26-9EAD-8AB4E668133E}" dt="2026-10-30T20:23:31.925" v="90" actId="1036"/>
+          <ac:spMkLst>
+            <pc:docMk/>
+            <pc:sldMk cId="2880897053" sldId="346"/>
+            <ac:spMk id="14" creationId="{638A4C18-5926-264C-70AC-A75904B5E5BD}"/>
+          </ac:spMkLst>
+        </pc:spChg>
+        <pc:spChg chg="mod">
+          <ac:chgData name="Eder Silva" userId="9b7f41b4-798d-40cf-8f87-8e33ae7a0417" providerId="ADAL" clId="{DFF9E84E-5922-4F26-9EAD-8AB4E668133E}" dt="2026-10-30T20:23:31.925" v="90" actId="1036"/>
+          <ac:spMkLst>
+            <pc:docMk/>
+            <pc:sldMk cId="2880897053" sldId="346"/>
+            <ac:spMk id="15" creationId="{97234AFC-988A-0945-9AD1-B4E40ABBA767}"/>
+          </ac:spMkLst>
+        </pc:spChg>
+        <pc:spChg chg="mod">
+          <ac:chgData name="Eder Silva" userId="9b7f41b4-798d-40cf-8f87-8e33ae7a0417" providerId="ADAL" clId="{DFF9E84E-5922-4F26-9EAD-8AB4E668133E}" dt="2026-10-30T20:23:31.925" v="90" actId="1036"/>
+          <ac:spMkLst>
+            <pc:docMk/>
+            <pc:sldMk cId="2880897053" sldId="346"/>
+            <ac:spMk id="16" creationId="{2101EF16-8789-92E8-760D-99B288081100}"/>
+          </ac:spMkLst>
+        </pc:spChg>
+      </pc:sldChg>
       <pc:sldChg chg="addSp modSp mod">
         <pc:chgData name="Eder Silva" userId="9b7f41b4-798d-40cf-8f87-8e33ae7a0417" providerId="ADAL" clId="{DFF9E84E-5922-4F26-9EAD-8AB4E668133E}" dt="2026-10-27T20:00:16.362" v="38"/>
         <pc:sldMkLst>
@@ -283,6 +351,641 @@
             <pc:docMk/>
             <pc:sldMk cId="1090551597" sldId="347"/>
             <ac:spMk id="55" creationId="{7437C6F7-0F28-A5C1-D5CD-AF61702EA8FD}"/>
+          </ac:spMkLst>
+        </pc:spChg>
+      </pc:sldChg>
+      <pc:sldChg chg="modSp mod">
+        <pc:chgData name="Eder Silva" userId="9b7f41b4-798d-40cf-8f87-8e33ae7a0417" providerId="ADAL" clId="{DFF9E84E-5922-4F26-9EAD-8AB4E668133E}" dt="2026-10-30T20:23:49.856" v="116" actId="1037"/>
+        <pc:sldMkLst>
+          <pc:docMk/>
+          <pc:sldMk cId="891328611" sldId="350"/>
+        </pc:sldMkLst>
+        <pc:spChg chg="mod">
+          <ac:chgData name="Eder Silva" userId="9b7f41b4-798d-40cf-8f87-8e33ae7a0417" providerId="ADAL" clId="{DFF9E84E-5922-4F26-9EAD-8AB4E668133E}" dt="2026-10-30T20:23:49.856" v="116" actId="1037"/>
+          <ac:spMkLst>
+            <pc:docMk/>
+            <pc:sldMk cId="891328611" sldId="350"/>
+            <ac:spMk id="2" creationId="{00000000-0000-0000-0000-000000000000}"/>
+          </ac:spMkLst>
+        </pc:spChg>
+      </pc:sldChg>
+      <pc:sldChg chg="modSp">
+        <pc:chgData name="Eder Silva" userId="9b7f41b4-798d-40cf-8f87-8e33ae7a0417" providerId="ADAL" clId="{DFF9E84E-5922-4F26-9EAD-8AB4E668133E}" dt="2026-10-30T20:23:59.716" v="118" actId="1076"/>
+        <pc:sldMkLst>
+          <pc:docMk/>
+          <pc:sldMk cId="2769663366" sldId="355"/>
+        </pc:sldMkLst>
+        <pc:spChg chg="mod">
+          <ac:chgData name="Eder Silva" userId="9b7f41b4-798d-40cf-8f87-8e33ae7a0417" providerId="ADAL" clId="{DFF9E84E-5922-4F26-9EAD-8AB4E668133E}" dt="2026-10-30T20:23:57.653" v="117" actId="1076"/>
+          <ac:spMkLst>
+            <pc:docMk/>
+            <pc:sldMk cId="2769663366" sldId="355"/>
+            <ac:spMk id="13" creationId="{59C36FEB-30DD-0668-CF42-4A541CDF54FC}"/>
+          </ac:spMkLst>
+        </pc:spChg>
+        <pc:spChg chg="mod">
+          <ac:chgData name="Eder Silva" userId="9b7f41b4-798d-40cf-8f87-8e33ae7a0417" providerId="ADAL" clId="{DFF9E84E-5922-4F26-9EAD-8AB4E668133E}" dt="2026-10-30T20:23:59.716" v="118" actId="1076"/>
+          <ac:spMkLst>
+            <pc:docMk/>
+            <pc:sldMk cId="2769663366" sldId="355"/>
+            <ac:spMk id="14" creationId="{93D60672-3178-CBDB-7356-C33D232EF61B}"/>
+          </ac:spMkLst>
+        </pc:spChg>
+      </pc:sldChg>
+      <pc:sldChg chg="modSp">
+        <pc:chgData name="Eder Silva" userId="9b7f41b4-798d-40cf-8f87-8e33ae7a0417" providerId="ADAL" clId="{DFF9E84E-5922-4F26-9EAD-8AB4E668133E}" dt="2026-10-30T20:24:07.824" v="148" actId="1035"/>
+        <pc:sldMkLst>
+          <pc:docMk/>
+          <pc:sldMk cId="1258992584" sldId="356"/>
+        </pc:sldMkLst>
+        <pc:spChg chg="mod">
+          <ac:chgData name="Eder Silva" userId="9b7f41b4-798d-40cf-8f87-8e33ae7a0417" providerId="ADAL" clId="{DFF9E84E-5922-4F26-9EAD-8AB4E668133E}" dt="2026-10-30T20:24:07.824" v="148" actId="1035"/>
+          <ac:spMkLst>
+            <pc:docMk/>
+            <pc:sldMk cId="1258992584" sldId="356"/>
+            <ac:spMk id="14" creationId="{1343074D-BD8B-8291-D3BC-8E58E9B93573}"/>
+          </ac:spMkLst>
+        </pc:spChg>
+        <pc:spChg chg="mod">
+          <ac:chgData name="Eder Silva" userId="9b7f41b4-798d-40cf-8f87-8e33ae7a0417" providerId="ADAL" clId="{DFF9E84E-5922-4F26-9EAD-8AB4E668133E}" dt="2026-10-30T20:24:07.824" v="148" actId="1035"/>
+          <ac:spMkLst>
+            <pc:docMk/>
+            <pc:sldMk cId="1258992584" sldId="356"/>
+            <ac:spMk id="15" creationId="{1F298121-A1B0-8B4E-F673-42670DD819DB}"/>
+          </ac:spMkLst>
+        </pc:spChg>
+        <pc:graphicFrameChg chg="mod">
+          <ac:chgData name="Eder Silva" userId="9b7f41b4-798d-40cf-8f87-8e33ae7a0417" providerId="ADAL" clId="{DFF9E84E-5922-4F26-9EAD-8AB4E668133E}" dt="2026-10-30T20:24:07.824" v="148" actId="1035"/>
+          <ac:graphicFrameMkLst>
+            <pc:docMk/>
+            <pc:sldMk cId="1258992584" sldId="356"/>
+            <ac:graphicFrameMk id="13" creationId="{1212AD0E-A126-438F-EECA-3716579AE718}"/>
+          </ac:graphicFrameMkLst>
+        </pc:graphicFrameChg>
+      </pc:sldChg>
+      <pc:sldChg chg="modSp">
+        <pc:chgData name="Eder Silva" userId="9b7f41b4-798d-40cf-8f87-8e33ae7a0417" providerId="ADAL" clId="{DFF9E84E-5922-4F26-9EAD-8AB4E668133E}" dt="2026-10-30T20:24:14.394" v="172" actId="1036"/>
+        <pc:sldMkLst>
+          <pc:docMk/>
+          <pc:sldMk cId="1046306642" sldId="357"/>
+        </pc:sldMkLst>
+        <pc:spChg chg="mod">
+          <ac:chgData name="Eder Silva" userId="9b7f41b4-798d-40cf-8f87-8e33ae7a0417" providerId="ADAL" clId="{DFF9E84E-5922-4F26-9EAD-8AB4E668133E}" dt="2026-10-30T20:24:14.394" v="172" actId="1036"/>
+          <ac:spMkLst>
+            <pc:docMk/>
+            <pc:sldMk cId="1046306642" sldId="357"/>
+            <ac:spMk id="13" creationId="{4EE104F5-47CE-04FB-B851-E06D5B52B1B1}"/>
+          </ac:spMkLst>
+        </pc:spChg>
+        <pc:spChg chg="mod">
+          <ac:chgData name="Eder Silva" userId="9b7f41b4-798d-40cf-8f87-8e33ae7a0417" providerId="ADAL" clId="{DFF9E84E-5922-4F26-9EAD-8AB4E668133E}" dt="2026-10-30T20:24:14.394" v="172" actId="1036"/>
+          <ac:spMkLst>
+            <pc:docMk/>
+            <pc:sldMk cId="1046306642" sldId="357"/>
+            <ac:spMk id="14" creationId="{5F8421F3-6FE5-3774-131A-34508457DEFD}"/>
+          </ac:spMkLst>
+        </pc:spChg>
+        <pc:spChg chg="mod">
+          <ac:chgData name="Eder Silva" userId="9b7f41b4-798d-40cf-8f87-8e33ae7a0417" providerId="ADAL" clId="{DFF9E84E-5922-4F26-9EAD-8AB4E668133E}" dt="2026-10-30T20:24:14.394" v="172" actId="1036"/>
+          <ac:spMkLst>
+            <pc:docMk/>
+            <pc:sldMk cId="1046306642" sldId="357"/>
+            <ac:spMk id="15" creationId="{9ED44E79-456B-9462-BDF6-2246BD53E8B0}"/>
+          </ac:spMkLst>
+        </pc:spChg>
+        <pc:spChg chg="mod">
+          <ac:chgData name="Eder Silva" userId="9b7f41b4-798d-40cf-8f87-8e33ae7a0417" providerId="ADAL" clId="{DFF9E84E-5922-4F26-9EAD-8AB4E668133E}" dt="2026-10-30T20:24:14.394" v="172" actId="1036"/>
+          <ac:spMkLst>
+            <pc:docMk/>
+            <pc:sldMk cId="1046306642" sldId="357"/>
+            <ac:spMk id="16" creationId="{1B917762-85EC-7FF5-EC9B-0588B008E2D6}"/>
+          </ac:spMkLst>
+        </pc:spChg>
+      </pc:sldChg>
+      <pc:sldChg chg="modSp">
+        <pc:chgData name="Eder Silva" userId="9b7f41b4-798d-40cf-8f87-8e33ae7a0417" providerId="ADAL" clId="{DFF9E84E-5922-4F26-9EAD-8AB4E668133E}" dt="2026-10-30T20:24:24.983" v="189" actId="1036"/>
+        <pc:sldMkLst>
+          <pc:docMk/>
+          <pc:sldMk cId="2732378770" sldId="360"/>
+        </pc:sldMkLst>
+        <pc:spChg chg="mod">
+          <ac:chgData name="Eder Silva" userId="9b7f41b4-798d-40cf-8f87-8e33ae7a0417" providerId="ADAL" clId="{DFF9E84E-5922-4F26-9EAD-8AB4E668133E}" dt="2026-10-30T20:24:24.983" v="189" actId="1036"/>
+          <ac:spMkLst>
+            <pc:docMk/>
+            <pc:sldMk cId="2732378770" sldId="360"/>
+            <ac:spMk id="39" creationId="{664A04EC-00DE-5628-8A24-3B58B052704A}"/>
+          </ac:spMkLst>
+        </pc:spChg>
+        <pc:spChg chg="mod">
+          <ac:chgData name="Eder Silva" userId="9b7f41b4-798d-40cf-8f87-8e33ae7a0417" providerId="ADAL" clId="{DFF9E84E-5922-4F26-9EAD-8AB4E668133E}" dt="2026-10-30T20:24:24.983" v="189" actId="1036"/>
+          <ac:spMkLst>
+            <pc:docMk/>
+            <pc:sldMk cId="2732378770" sldId="360"/>
+            <ac:spMk id="40" creationId="{1CB521D8-AE91-169B-4433-07A423E0F86C}"/>
+          </ac:spMkLst>
+        </pc:spChg>
+        <pc:spChg chg="mod">
+          <ac:chgData name="Eder Silva" userId="9b7f41b4-798d-40cf-8f87-8e33ae7a0417" providerId="ADAL" clId="{DFF9E84E-5922-4F26-9EAD-8AB4E668133E}" dt="2026-10-30T20:24:24.983" v="189" actId="1036"/>
+          <ac:spMkLst>
+            <pc:docMk/>
+            <pc:sldMk cId="2732378770" sldId="360"/>
+            <ac:spMk id="41" creationId="{C7F77C3F-28A0-7A2D-0AAC-94A046F2955D}"/>
+          </ac:spMkLst>
+        </pc:spChg>
+        <pc:spChg chg="mod">
+          <ac:chgData name="Eder Silva" userId="9b7f41b4-798d-40cf-8f87-8e33ae7a0417" providerId="ADAL" clId="{DFF9E84E-5922-4F26-9EAD-8AB4E668133E}" dt="2026-10-30T20:24:24.983" v="189" actId="1036"/>
+          <ac:spMkLst>
+            <pc:docMk/>
+            <pc:sldMk cId="2732378770" sldId="360"/>
+            <ac:spMk id="42" creationId="{8E4B5D1B-9FCF-E2A0-0EC0-BED1AEB0311F}"/>
+          </ac:spMkLst>
+        </pc:spChg>
+        <pc:spChg chg="mod">
+          <ac:chgData name="Eder Silva" userId="9b7f41b4-798d-40cf-8f87-8e33ae7a0417" providerId="ADAL" clId="{DFF9E84E-5922-4F26-9EAD-8AB4E668133E}" dt="2026-10-30T20:24:24.983" v="189" actId="1036"/>
+          <ac:spMkLst>
+            <pc:docMk/>
+            <pc:sldMk cId="2732378770" sldId="360"/>
+            <ac:spMk id="43" creationId="{7DCEEE89-0F25-1185-8C56-E78E2D39BAC0}"/>
+          </ac:spMkLst>
+        </pc:spChg>
+        <pc:spChg chg="mod">
+          <ac:chgData name="Eder Silva" userId="9b7f41b4-798d-40cf-8f87-8e33ae7a0417" providerId="ADAL" clId="{DFF9E84E-5922-4F26-9EAD-8AB4E668133E}" dt="2026-10-30T20:24:24.983" v="189" actId="1036"/>
+          <ac:spMkLst>
+            <pc:docMk/>
+            <pc:sldMk cId="2732378770" sldId="360"/>
+            <ac:spMk id="44" creationId="{AE8529F8-33EC-D888-2C9B-8CDCE17A09B1}"/>
+          </ac:spMkLst>
+        </pc:spChg>
+        <pc:spChg chg="mod">
+          <ac:chgData name="Eder Silva" userId="9b7f41b4-798d-40cf-8f87-8e33ae7a0417" providerId="ADAL" clId="{DFF9E84E-5922-4F26-9EAD-8AB4E668133E}" dt="2026-10-30T20:24:24.983" v="189" actId="1036"/>
+          <ac:spMkLst>
+            <pc:docMk/>
+            <pc:sldMk cId="2732378770" sldId="360"/>
+            <ac:spMk id="45" creationId="{89E87355-FADB-EAEC-889B-354F8F597E63}"/>
+          </ac:spMkLst>
+        </pc:spChg>
+        <pc:spChg chg="mod">
+          <ac:chgData name="Eder Silva" userId="9b7f41b4-798d-40cf-8f87-8e33ae7a0417" providerId="ADAL" clId="{DFF9E84E-5922-4F26-9EAD-8AB4E668133E}" dt="2026-10-30T20:24:24.983" v="189" actId="1036"/>
+          <ac:spMkLst>
+            <pc:docMk/>
+            <pc:sldMk cId="2732378770" sldId="360"/>
+            <ac:spMk id="46" creationId="{8DDD159C-8723-B8FA-9A50-7C1D5A382B44}"/>
+          </ac:spMkLst>
+        </pc:spChg>
+        <pc:spChg chg="mod">
+          <ac:chgData name="Eder Silva" userId="9b7f41b4-798d-40cf-8f87-8e33ae7a0417" providerId="ADAL" clId="{DFF9E84E-5922-4F26-9EAD-8AB4E668133E}" dt="2026-10-30T20:24:24.983" v="189" actId="1036"/>
+          <ac:spMkLst>
+            <pc:docMk/>
+            <pc:sldMk cId="2732378770" sldId="360"/>
+            <ac:spMk id="47" creationId="{29B65B72-1339-A019-A6E8-EA4130D30374}"/>
+          </ac:spMkLst>
+        </pc:spChg>
+        <pc:spChg chg="mod">
+          <ac:chgData name="Eder Silva" userId="9b7f41b4-798d-40cf-8f87-8e33ae7a0417" providerId="ADAL" clId="{DFF9E84E-5922-4F26-9EAD-8AB4E668133E}" dt="2026-10-30T20:24:24.983" v="189" actId="1036"/>
+          <ac:spMkLst>
+            <pc:docMk/>
+            <pc:sldMk cId="2732378770" sldId="360"/>
+            <ac:spMk id="48" creationId="{8EDA825F-BCD6-1453-3362-E626B9EAA4E7}"/>
+          </ac:spMkLst>
+        </pc:spChg>
+      </pc:sldChg>
+      <pc:sldChg chg="modSp mod">
+        <pc:chgData name="Eder Silva" userId="9b7f41b4-798d-40cf-8f87-8e33ae7a0417" providerId="ADAL" clId="{DFF9E84E-5922-4F26-9EAD-8AB4E668133E}" dt="2026-10-30T20:24:32.713" v="190" actId="1076"/>
+        <pc:sldMkLst>
+          <pc:docMk/>
+          <pc:sldMk cId="2394153103" sldId="361"/>
+        </pc:sldMkLst>
+        <pc:spChg chg="mod">
+          <ac:chgData name="Eder Silva" userId="9b7f41b4-798d-40cf-8f87-8e33ae7a0417" providerId="ADAL" clId="{DFF9E84E-5922-4F26-9EAD-8AB4E668133E}" dt="2026-10-30T20:24:32.713" v="190" actId="1076"/>
+          <ac:spMkLst>
+            <pc:docMk/>
+            <pc:sldMk cId="2394153103" sldId="361"/>
+            <ac:spMk id="13" creationId="{42890CFA-06E4-0A3D-1E53-4193D6A462DE}"/>
+          </ac:spMkLst>
+        </pc:spChg>
+      </pc:sldChg>
+      <pc:sldChg chg="modSp mod">
+        <pc:chgData name="Eder Silva" userId="9b7f41b4-798d-40cf-8f87-8e33ae7a0417" providerId="ADAL" clId="{DFF9E84E-5922-4F26-9EAD-8AB4E668133E}" dt="2026-10-30T20:24:49.216" v="269" actId="1036"/>
+        <pc:sldMkLst>
+          <pc:docMk/>
+          <pc:sldMk cId="911122149" sldId="362"/>
+        </pc:sldMkLst>
+        <pc:spChg chg="mod">
+          <ac:chgData name="Eder Silva" userId="9b7f41b4-798d-40cf-8f87-8e33ae7a0417" providerId="ADAL" clId="{DFF9E84E-5922-4F26-9EAD-8AB4E668133E}" dt="2026-10-30T20:24:49.216" v="269" actId="1036"/>
+          <ac:spMkLst>
+            <pc:docMk/>
+            <pc:sldMk cId="911122149" sldId="362"/>
+            <ac:spMk id="13" creationId="{4CA24D8F-660E-E222-C4C7-E29ACFCABD1B}"/>
+          </ac:spMkLst>
+        </pc:spChg>
+        <pc:spChg chg="mod">
+          <ac:chgData name="Eder Silva" userId="9b7f41b4-798d-40cf-8f87-8e33ae7a0417" providerId="ADAL" clId="{DFF9E84E-5922-4F26-9EAD-8AB4E668133E}" dt="2026-10-30T20:24:49.216" v="269" actId="1036"/>
+          <ac:spMkLst>
+            <pc:docMk/>
+            <pc:sldMk cId="911122149" sldId="362"/>
+            <ac:spMk id="14" creationId="{F623D896-A7EF-D810-5183-11C81E459A82}"/>
+          </ac:spMkLst>
+        </pc:spChg>
+        <pc:spChg chg="mod">
+          <ac:chgData name="Eder Silva" userId="9b7f41b4-798d-40cf-8f87-8e33ae7a0417" providerId="ADAL" clId="{DFF9E84E-5922-4F26-9EAD-8AB4E668133E}" dt="2026-10-30T20:24:39.894" v="225" actId="1036"/>
+          <ac:spMkLst>
+            <pc:docMk/>
+            <pc:sldMk cId="911122149" sldId="362"/>
+            <ac:spMk id="15" creationId="{513E5C81-67D8-281F-CEAA-6C30921E501C}"/>
+          </ac:spMkLst>
+        </pc:spChg>
+      </pc:sldChg>
+      <pc:sldChg chg="modSp">
+        <pc:chgData name="Eder Silva" userId="9b7f41b4-798d-40cf-8f87-8e33ae7a0417" providerId="ADAL" clId="{DFF9E84E-5922-4F26-9EAD-8AB4E668133E}" dt="2026-10-30T20:24:58.215" v="292" actId="1036"/>
+        <pc:sldMkLst>
+          <pc:docMk/>
+          <pc:sldMk cId="4015884241" sldId="364"/>
+        </pc:sldMkLst>
+        <pc:spChg chg="mod">
+          <ac:chgData name="Eder Silva" userId="9b7f41b4-798d-40cf-8f87-8e33ae7a0417" providerId="ADAL" clId="{DFF9E84E-5922-4F26-9EAD-8AB4E668133E}" dt="2026-10-30T20:24:58.215" v="292" actId="1036"/>
+          <ac:spMkLst>
+            <pc:docMk/>
+            <pc:sldMk cId="4015884241" sldId="364"/>
+            <ac:spMk id="20" creationId="{703114ED-8153-FB6A-935C-C396A4FF5DB2}"/>
+          </ac:spMkLst>
+        </pc:spChg>
+        <pc:spChg chg="mod">
+          <ac:chgData name="Eder Silva" userId="9b7f41b4-798d-40cf-8f87-8e33ae7a0417" providerId="ADAL" clId="{DFF9E84E-5922-4F26-9EAD-8AB4E668133E}" dt="2026-10-30T20:24:58.215" v="292" actId="1036"/>
+          <ac:spMkLst>
+            <pc:docMk/>
+            <pc:sldMk cId="4015884241" sldId="364"/>
+            <ac:spMk id="21" creationId="{151AF5C9-4173-CA1E-D334-476882D3D581}"/>
+          </ac:spMkLst>
+        </pc:spChg>
+        <pc:spChg chg="mod">
+          <ac:chgData name="Eder Silva" userId="9b7f41b4-798d-40cf-8f87-8e33ae7a0417" providerId="ADAL" clId="{DFF9E84E-5922-4F26-9EAD-8AB4E668133E}" dt="2026-10-30T20:24:58.215" v="292" actId="1036"/>
+          <ac:spMkLst>
+            <pc:docMk/>
+            <pc:sldMk cId="4015884241" sldId="364"/>
+            <ac:spMk id="22" creationId="{0D7A83AE-65EF-033D-08BE-D448B2F3E2DF}"/>
+          </ac:spMkLst>
+        </pc:spChg>
+        <pc:spChg chg="mod">
+          <ac:chgData name="Eder Silva" userId="9b7f41b4-798d-40cf-8f87-8e33ae7a0417" providerId="ADAL" clId="{DFF9E84E-5922-4F26-9EAD-8AB4E668133E}" dt="2026-10-30T20:24:58.215" v="292" actId="1036"/>
+          <ac:spMkLst>
+            <pc:docMk/>
+            <pc:sldMk cId="4015884241" sldId="364"/>
+            <ac:spMk id="23" creationId="{5CD36487-CCF1-A6AC-EC94-8BCBEFA44894}"/>
+          </ac:spMkLst>
+        </pc:spChg>
+        <pc:spChg chg="mod">
+          <ac:chgData name="Eder Silva" userId="9b7f41b4-798d-40cf-8f87-8e33ae7a0417" providerId="ADAL" clId="{DFF9E84E-5922-4F26-9EAD-8AB4E668133E}" dt="2026-10-30T20:24:58.215" v="292" actId="1036"/>
+          <ac:spMkLst>
+            <pc:docMk/>
+            <pc:sldMk cId="4015884241" sldId="364"/>
+            <ac:spMk id="24" creationId="{B1D2D1BD-28D4-9669-E945-599AB89862C9}"/>
+          </ac:spMkLst>
+        </pc:spChg>
+        <pc:spChg chg="mod">
+          <ac:chgData name="Eder Silva" userId="9b7f41b4-798d-40cf-8f87-8e33ae7a0417" providerId="ADAL" clId="{DFF9E84E-5922-4F26-9EAD-8AB4E668133E}" dt="2026-10-30T20:24:58.215" v="292" actId="1036"/>
+          <ac:spMkLst>
+            <pc:docMk/>
+            <pc:sldMk cId="4015884241" sldId="364"/>
+            <ac:spMk id="25" creationId="{C8799960-64D4-2ED8-C22E-F42A38E052F7}"/>
+          </ac:spMkLst>
+        </pc:spChg>
+        <pc:spChg chg="mod">
+          <ac:chgData name="Eder Silva" userId="9b7f41b4-798d-40cf-8f87-8e33ae7a0417" providerId="ADAL" clId="{DFF9E84E-5922-4F26-9EAD-8AB4E668133E}" dt="2026-10-30T20:24:58.215" v="292" actId="1036"/>
+          <ac:spMkLst>
+            <pc:docMk/>
+            <pc:sldMk cId="4015884241" sldId="364"/>
+            <ac:spMk id="26" creationId="{3B928591-B460-068E-F405-94CC2E6C0FAC}"/>
+          </ac:spMkLst>
+        </pc:spChg>
+      </pc:sldChg>
+      <pc:sldChg chg="modSp mod">
+        <pc:chgData name="Eder Silva" userId="9b7f41b4-798d-40cf-8f87-8e33ae7a0417" providerId="ADAL" clId="{DFF9E84E-5922-4F26-9EAD-8AB4E668133E}" dt="2026-10-30T20:25:13.562" v="316" actId="1036"/>
+        <pc:sldMkLst>
+          <pc:docMk/>
+          <pc:sldMk cId="2778422136" sldId="368"/>
+        </pc:sldMkLst>
+        <pc:spChg chg="mod">
+          <ac:chgData name="Eder Silva" userId="9b7f41b4-798d-40cf-8f87-8e33ae7a0417" providerId="ADAL" clId="{DFF9E84E-5922-4F26-9EAD-8AB4E668133E}" dt="2026-10-30T20:25:13.562" v="316" actId="1036"/>
+          <ac:spMkLst>
+            <pc:docMk/>
+            <pc:sldMk cId="2778422136" sldId="368"/>
+            <ac:spMk id="13" creationId="{451CE719-161F-77F7-D1B4-6152E8668067}"/>
+          </ac:spMkLst>
+        </pc:spChg>
+      </pc:sldChg>
+      <pc:sldChg chg="modSp mod">
+        <pc:chgData name="Eder Silva" userId="9b7f41b4-798d-40cf-8f87-8e33ae7a0417" providerId="ADAL" clId="{DFF9E84E-5922-4F26-9EAD-8AB4E668133E}" dt="2026-10-30T20:25:22.719" v="332" actId="1036"/>
+        <pc:sldMkLst>
+          <pc:docMk/>
+          <pc:sldMk cId="321078007" sldId="369"/>
+        </pc:sldMkLst>
+        <pc:spChg chg="mod">
+          <ac:chgData name="Eder Silva" userId="9b7f41b4-798d-40cf-8f87-8e33ae7a0417" providerId="ADAL" clId="{DFF9E84E-5922-4F26-9EAD-8AB4E668133E}" dt="2026-10-30T20:25:22.719" v="332" actId="1036"/>
+          <ac:spMkLst>
+            <pc:docMk/>
+            <pc:sldMk cId="321078007" sldId="369"/>
+            <ac:spMk id="14" creationId="{A82EAD23-FDED-66B3-3121-CFB37587EBF7}"/>
+          </ac:spMkLst>
+        </pc:spChg>
+        <pc:graphicFrameChg chg="mod">
+          <ac:chgData name="Eder Silva" userId="9b7f41b4-798d-40cf-8f87-8e33ae7a0417" providerId="ADAL" clId="{DFF9E84E-5922-4F26-9EAD-8AB4E668133E}" dt="2026-10-30T20:25:22.719" v="332" actId="1036"/>
+          <ac:graphicFrameMkLst>
+            <pc:docMk/>
+            <pc:sldMk cId="321078007" sldId="369"/>
+            <ac:graphicFrameMk id="13" creationId="{AFB56DC5-9C53-E94B-8070-AB6E01A854FF}"/>
+          </ac:graphicFrameMkLst>
+        </pc:graphicFrameChg>
+      </pc:sldChg>
+      <pc:sldChg chg="modSp mod">
+        <pc:chgData name="Eder Silva" userId="9b7f41b4-798d-40cf-8f87-8e33ae7a0417" providerId="ADAL" clId="{DFF9E84E-5922-4F26-9EAD-8AB4E668133E}" dt="2026-10-30T20:25:28.827" v="354" actId="1036"/>
+        <pc:sldMkLst>
+          <pc:docMk/>
+          <pc:sldMk cId="4282720246" sldId="370"/>
+        </pc:sldMkLst>
+        <pc:spChg chg="mod">
+          <ac:chgData name="Eder Silva" userId="9b7f41b4-798d-40cf-8f87-8e33ae7a0417" providerId="ADAL" clId="{DFF9E84E-5922-4F26-9EAD-8AB4E668133E}" dt="2026-10-30T20:25:28.827" v="354" actId="1036"/>
+          <ac:spMkLst>
+            <pc:docMk/>
+            <pc:sldMk cId="4282720246" sldId="370"/>
+            <ac:spMk id="14" creationId="{82160036-FB03-31EC-B2A2-8A45B4B1C52B}"/>
+          </ac:spMkLst>
+        </pc:spChg>
+        <pc:graphicFrameChg chg="mod">
+          <ac:chgData name="Eder Silva" userId="9b7f41b4-798d-40cf-8f87-8e33ae7a0417" providerId="ADAL" clId="{DFF9E84E-5922-4F26-9EAD-8AB4E668133E}" dt="2026-10-30T20:25:28.827" v="354" actId="1036"/>
+          <ac:graphicFrameMkLst>
+            <pc:docMk/>
+            <pc:sldMk cId="4282720246" sldId="370"/>
+            <ac:graphicFrameMk id="13" creationId="{020450EC-5904-695C-0D61-F893125E6DCC}"/>
+          </ac:graphicFrameMkLst>
+        </pc:graphicFrameChg>
+      </pc:sldChg>
+      <pc:sldChg chg="modSp mod">
+        <pc:chgData name="Eder Silva" userId="9b7f41b4-798d-40cf-8f87-8e33ae7a0417" providerId="ADAL" clId="{DFF9E84E-5922-4F26-9EAD-8AB4E668133E}" dt="2026-10-30T20:25:35.614" v="378" actId="1036"/>
+        <pc:sldMkLst>
+          <pc:docMk/>
+          <pc:sldMk cId="2520938357" sldId="371"/>
+        </pc:sldMkLst>
+        <pc:spChg chg="mod">
+          <ac:chgData name="Eder Silva" userId="9b7f41b4-798d-40cf-8f87-8e33ae7a0417" providerId="ADAL" clId="{DFF9E84E-5922-4F26-9EAD-8AB4E668133E}" dt="2026-10-30T20:25:35.614" v="378" actId="1036"/>
+          <ac:spMkLst>
+            <pc:docMk/>
+            <pc:sldMk cId="2520938357" sldId="371"/>
+            <ac:spMk id="14" creationId="{46158F15-E602-F63B-2718-4505993B7998}"/>
+          </ac:spMkLst>
+        </pc:spChg>
+        <pc:graphicFrameChg chg="mod">
+          <ac:chgData name="Eder Silva" userId="9b7f41b4-798d-40cf-8f87-8e33ae7a0417" providerId="ADAL" clId="{DFF9E84E-5922-4F26-9EAD-8AB4E668133E}" dt="2026-10-30T20:25:35.614" v="378" actId="1036"/>
+          <ac:graphicFrameMkLst>
+            <pc:docMk/>
+            <pc:sldMk cId="2520938357" sldId="371"/>
+            <ac:graphicFrameMk id="13" creationId="{35674AD5-4BB2-7A32-0AAB-332FBC6497CF}"/>
+          </ac:graphicFrameMkLst>
+        </pc:graphicFrameChg>
+      </pc:sldChg>
+      <pc:sldChg chg="modSp mod">
+        <pc:chgData name="Eder Silva" userId="9b7f41b4-798d-40cf-8f87-8e33ae7a0417" providerId="ADAL" clId="{DFF9E84E-5922-4F26-9EAD-8AB4E668133E}" dt="2026-10-30T20:25:42.437" v="379" actId="1076"/>
+        <pc:sldMkLst>
+          <pc:docMk/>
+          <pc:sldMk cId="2516257348" sldId="372"/>
+        </pc:sldMkLst>
+        <pc:spChg chg="mod">
+          <ac:chgData name="Eder Silva" userId="9b7f41b4-798d-40cf-8f87-8e33ae7a0417" providerId="ADAL" clId="{DFF9E84E-5922-4F26-9EAD-8AB4E668133E}" dt="2026-10-30T20:25:42.437" v="379" actId="1076"/>
+          <ac:spMkLst>
+            <pc:docMk/>
+            <pc:sldMk cId="2516257348" sldId="372"/>
+            <ac:spMk id="2" creationId="{00000000-0000-0000-0000-000000000000}"/>
+          </ac:spMkLst>
+        </pc:spChg>
+      </pc:sldChg>
+      <pc:sldChg chg="modSp mod">
+        <pc:chgData name="Eder Silva" userId="9b7f41b4-798d-40cf-8f87-8e33ae7a0417" providerId="ADAL" clId="{DFF9E84E-5922-4F26-9EAD-8AB4E668133E}" dt="2026-10-30T20:25:47.486" v="402" actId="1036"/>
+        <pc:sldMkLst>
+          <pc:docMk/>
+          <pc:sldMk cId="1909318983" sldId="373"/>
+        </pc:sldMkLst>
+        <pc:spChg chg="mod">
+          <ac:chgData name="Eder Silva" userId="9b7f41b4-798d-40cf-8f87-8e33ae7a0417" providerId="ADAL" clId="{DFF9E84E-5922-4F26-9EAD-8AB4E668133E}" dt="2026-10-30T20:25:47.486" v="402" actId="1036"/>
+          <ac:spMkLst>
+            <pc:docMk/>
+            <pc:sldMk cId="1909318983" sldId="373"/>
+            <ac:spMk id="13" creationId="{C74E7E86-8609-FF82-7639-E490B08D23B9}"/>
+          </ac:spMkLst>
+        </pc:spChg>
+      </pc:sldChg>
+      <pc:sldChg chg="modSp mod">
+        <pc:chgData name="Eder Silva" userId="9b7f41b4-798d-40cf-8f87-8e33ae7a0417" providerId="ADAL" clId="{DFF9E84E-5922-4F26-9EAD-8AB4E668133E}" dt="2026-10-30T20:26:00.112" v="429" actId="1036"/>
+        <pc:sldMkLst>
+          <pc:docMk/>
+          <pc:sldMk cId="978451264" sldId="375"/>
+        </pc:sldMkLst>
+        <pc:spChg chg="mod">
+          <ac:chgData name="Eder Silva" userId="9b7f41b4-798d-40cf-8f87-8e33ae7a0417" providerId="ADAL" clId="{DFF9E84E-5922-4F26-9EAD-8AB4E668133E}" dt="2026-10-30T20:26:00.112" v="429" actId="1036"/>
+          <ac:spMkLst>
+            <pc:docMk/>
+            <pc:sldMk cId="978451264" sldId="375"/>
+            <ac:spMk id="13" creationId="{03F5E172-2FF7-0F95-9781-46D43488EFE5}"/>
+          </ac:spMkLst>
+        </pc:spChg>
+      </pc:sldChg>
+      <pc:sldChg chg="modSp mod">
+        <pc:chgData name="Eder Silva" userId="9b7f41b4-798d-40cf-8f87-8e33ae7a0417" providerId="ADAL" clId="{DFF9E84E-5922-4F26-9EAD-8AB4E668133E}" dt="2026-10-30T20:26:06.322" v="430" actId="1076"/>
+        <pc:sldMkLst>
+          <pc:docMk/>
+          <pc:sldMk cId="232916279" sldId="376"/>
+        </pc:sldMkLst>
+        <pc:spChg chg="mod">
+          <ac:chgData name="Eder Silva" userId="9b7f41b4-798d-40cf-8f87-8e33ae7a0417" providerId="ADAL" clId="{DFF9E84E-5922-4F26-9EAD-8AB4E668133E}" dt="2026-10-30T20:26:06.322" v="430" actId="1076"/>
+          <ac:spMkLst>
+            <pc:docMk/>
+            <pc:sldMk cId="232916279" sldId="376"/>
+            <ac:spMk id="2" creationId="{00000000-0000-0000-0000-000000000000}"/>
+          </ac:spMkLst>
+        </pc:spChg>
+      </pc:sldChg>
+      <pc:sldChg chg="modSp">
+        <pc:chgData name="Eder Silva" userId="9b7f41b4-798d-40cf-8f87-8e33ae7a0417" providerId="ADAL" clId="{DFF9E84E-5922-4F26-9EAD-8AB4E668133E}" dt="2026-10-30T20:26:14.199" v="453" actId="1036"/>
+        <pc:sldMkLst>
+          <pc:docMk/>
+          <pc:sldMk cId="1321466611" sldId="380"/>
+        </pc:sldMkLst>
+        <pc:spChg chg="mod">
+          <ac:chgData name="Eder Silva" userId="9b7f41b4-798d-40cf-8f87-8e33ae7a0417" providerId="ADAL" clId="{DFF9E84E-5922-4F26-9EAD-8AB4E668133E}" dt="2026-10-30T20:26:14.199" v="453" actId="1036"/>
+          <ac:spMkLst>
+            <pc:docMk/>
+            <pc:sldMk cId="1321466611" sldId="380"/>
+            <ac:spMk id="45" creationId="{CF4F20FF-A4D6-E9A2-1235-DA2935D350CB}"/>
+          </ac:spMkLst>
+        </pc:spChg>
+        <pc:spChg chg="mod">
+          <ac:chgData name="Eder Silva" userId="9b7f41b4-798d-40cf-8f87-8e33ae7a0417" providerId="ADAL" clId="{DFF9E84E-5922-4F26-9EAD-8AB4E668133E}" dt="2026-10-30T20:26:14.199" v="453" actId="1036"/>
+          <ac:spMkLst>
+            <pc:docMk/>
+            <pc:sldMk cId="1321466611" sldId="380"/>
+            <ac:spMk id="46" creationId="{42196518-2D8B-2AA9-F721-B63B4123AACC}"/>
+          </ac:spMkLst>
+        </pc:spChg>
+        <pc:spChg chg="mod">
+          <ac:chgData name="Eder Silva" userId="9b7f41b4-798d-40cf-8f87-8e33ae7a0417" providerId="ADAL" clId="{DFF9E84E-5922-4F26-9EAD-8AB4E668133E}" dt="2026-10-30T20:26:14.199" v="453" actId="1036"/>
+          <ac:spMkLst>
+            <pc:docMk/>
+            <pc:sldMk cId="1321466611" sldId="380"/>
+            <ac:spMk id="47" creationId="{626DAB51-8D58-21DD-7710-701ACE3BE87A}"/>
+          </ac:spMkLst>
+        </pc:spChg>
+        <pc:spChg chg="mod">
+          <ac:chgData name="Eder Silva" userId="9b7f41b4-798d-40cf-8f87-8e33ae7a0417" providerId="ADAL" clId="{DFF9E84E-5922-4F26-9EAD-8AB4E668133E}" dt="2026-10-30T20:26:14.199" v="453" actId="1036"/>
+          <ac:spMkLst>
+            <pc:docMk/>
+            <pc:sldMk cId="1321466611" sldId="380"/>
+            <ac:spMk id="48" creationId="{3620EC2E-AF60-2076-9271-02C292BFDDA6}"/>
+          </ac:spMkLst>
+        </pc:spChg>
+        <pc:spChg chg="mod">
+          <ac:chgData name="Eder Silva" userId="9b7f41b4-798d-40cf-8f87-8e33ae7a0417" providerId="ADAL" clId="{DFF9E84E-5922-4F26-9EAD-8AB4E668133E}" dt="2026-10-30T20:26:14.199" v="453" actId="1036"/>
+          <ac:spMkLst>
+            <pc:docMk/>
+            <pc:sldMk cId="1321466611" sldId="380"/>
+            <ac:spMk id="49" creationId="{153E0DE9-8798-9492-6A0F-D9FF35BA8854}"/>
+          </ac:spMkLst>
+        </pc:spChg>
+        <pc:spChg chg="mod">
+          <ac:chgData name="Eder Silva" userId="9b7f41b4-798d-40cf-8f87-8e33ae7a0417" providerId="ADAL" clId="{DFF9E84E-5922-4F26-9EAD-8AB4E668133E}" dt="2026-10-30T20:26:14.199" v="453" actId="1036"/>
+          <ac:spMkLst>
+            <pc:docMk/>
+            <pc:sldMk cId="1321466611" sldId="380"/>
+            <ac:spMk id="50" creationId="{00E08726-D74D-E072-871E-CEA64ADAA2D3}"/>
+          </ac:spMkLst>
+        </pc:spChg>
+        <pc:spChg chg="mod">
+          <ac:chgData name="Eder Silva" userId="9b7f41b4-798d-40cf-8f87-8e33ae7a0417" providerId="ADAL" clId="{DFF9E84E-5922-4F26-9EAD-8AB4E668133E}" dt="2026-10-30T20:26:14.199" v="453" actId="1036"/>
+          <ac:spMkLst>
+            <pc:docMk/>
+            <pc:sldMk cId="1321466611" sldId="380"/>
+            <ac:spMk id="51" creationId="{578406CC-524C-73BD-D404-DD5679C27FA6}"/>
+          </ac:spMkLst>
+        </pc:spChg>
+        <pc:spChg chg="mod">
+          <ac:chgData name="Eder Silva" userId="9b7f41b4-798d-40cf-8f87-8e33ae7a0417" providerId="ADAL" clId="{DFF9E84E-5922-4F26-9EAD-8AB4E668133E}" dt="2026-10-30T20:26:14.199" v="453" actId="1036"/>
+          <ac:spMkLst>
+            <pc:docMk/>
+            <pc:sldMk cId="1321466611" sldId="380"/>
+            <ac:spMk id="52" creationId="{0BD86BA5-D20E-9DCC-8E53-A14C4AF0A1FF}"/>
+          </ac:spMkLst>
+        </pc:spChg>
+        <pc:spChg chg="mod">
+          <ac:chgData name="Eder Silva" userId="9b7f41b4-798d-40cf-8f87-8e33ae7a0417" providerId="ADAL" clId="{DFF9E84E-5922-4F26-9EAD-8AB4E668133E}" dt="2026-10-30T20:26:14.199" v="453" actId="1036"/>
+          <ac:spMkLst>
+            <pc:docMk/>
+            <pc:sldMk cId="1321466611" sldId="380"/>
+            <ac:spMk id="53" creationId="{E5989BA6-02ED-642A-9FE4-DD713109C28C}"/>
+          </ac:spMkLst>
+        </pc:spChg>
+        <pc:spChg chg="mod">
+          <ac:chgData name="Eder Silva" userId="9b7f41b4-798d-40cf-8f87-8e33ae7a0417" providerId="ADAL" clId="{DFF9E84E-5922-4F26-9EAD-8AB4E668133E}" dt="2026-10-30T20:26:14.199" v="453" actId="1036"/>
+          <ac:spMkLst>
+            <pc:docMk/>
+            <pc:sldMk cId="1321466611" sldId="380"/>
+            <ac:spMk id="54" creationId="{38AE3A59-2AFA-23A3-731A-1738F888858C}"/>
+          </ac:spMkLst>
+        </pc:spChg>
+      </pc:sldChg>
+      <pc:sldChg chg="modSp mod">
+        <pc:chgData name="Eder Silva" userId="9b7f41b4-798d-40cf-8f87-8e33ae7a0417" providerId="ADAL" clId="{DFF9E84E-5922-4F26-9EAD-8AB4E668133E}" dt="2026-10-30T20:26:32.213" v="479" actId="1036"/>
+        <pc:sldMkLst>
+          <pc:docMk/>
+          <pc:sldMk cId="1242731414" sldId="385"/>
+        </pc:sldMkLst>
+        <pc:spChg chg="mod">
+          <ac:chgData name="Eder Silva" userId="9b7f41b4-798d-40cf-8f87-8e33ae7a0417" providerId="ADAL" clId="{DFF9E84E-5922-4F26-9EAD-8AB4E668133E}" dt="2026-10-30T20:26:32.213" v="479" actId="1036"/>
+          <ac:spMkLst>
+            <pc:docMk/>
+            <pc:sldMk cId="1242731414" sldId="385"/>
+            <ac:spMk id="13" creationId="{1DE3FC91-8ED8-E5AF-8FC3-C72223310442}"/>
+          </ac:spMkLst>
+        </pc:spChg>
+      </pc:sldChg>
+      <pc:sldChg chg="modSp">
+        <pc:chgData name="Eder Silva" userId="9b7f41b4-798d-40cf-8f87-8e33ae7a0417" providerId="ADAL" clId="{DFF9E84E-5922-4F26-9EAD-8AB4E668133E}" dt="2026-10-30T20:26:36.946" v="501" actId="1036"/>
+        <pc:sldMkLst>
+          <pc:docMk/>
+          <pc:sldMk cId="970718475" sldId="386"/>
+        </pc:sldMkLst>
+        <pc:spChg chg="mod">
+          <ac:chgData name="Eder Silva" userId="9b7f41b4-798d-40cf-8f87-8e33ae7a0417" providerId="ADAL" clId="{DFF9E84E-5922-4F26-9EAD-8AB4E668133E}" dt="2026-10-30T20:26:36.946" v="501" actId="1036"/>
+          <ac:spMkLst>
+            <pc:docMk/>
+            <pc:sldMk cId="970718475" sldId="386"/>
+            <ac:spMk id="13" creationId="{71F86752-8EB3-7E2E-1C7D-ED3DEFBD17B2}"/>
+          </ac:spMkLst>
+        </pc:spChg>
+        <pc:spChg chg="mod">
+          <ac:chgData name="Eder Silva" userId="9b7f41b4-798d-40cf-8f87-8e33ae7a0417" providerId="ADAL" clId="{DFF9E84E-5922-4F26-9EAD-8AB4E668133E}" dt="2026-10-30T20:26:36.946" v="501" actId="1036"/>
+          <ac:spMkLst>
+            <pc:docMk/>
+            <pc:sldMk cId="970718475" sldId="386"/>
+            <ac:spMk id="14" creationId="{01AFDE90-7356-C214-2378-5120C5C60BF8}"/>
+          </ac:spMkLst>
+        </pc:spChg>
+        <pc:spChg chg="mod">
+          <ac:chgData name="Eder Silva" userId="9b7f41b4-798d-40cf-8f87-8e33ae7a0417" providerId="ADAL" clId="{DFF9E84E-5922-4F26-9EAD-8AB4E668133E}" dt="2026-10-30T20:26:36.946" v="501" actId="1036"/>
+          <ac:spMkLst>
+            <pc:docMk/>
+            <pc:sldMk cId="970718475" sldId="386"/>
+            <ac:spMk id="15" creationId="{9F6780AF-9EE6-93CD-9BE3-8F9595DBDC75}"/>
+          </ac:spMkLst>
+        </pc:spChg>
+      </pc:sldChg>
+      <pc:sldChg chg="modSp">
+        <pc:chgData name="Eder Silva" userId="9b7f41b4-798d-40cf-8f87-8e33ae7a0417" providerId="ADAL" clId="{DFF9E84E-5922-4F26-9EAD-8AB4E668133E}" dt="2026-10-30T20:26:45.053" v="523" actId="1036"/>
+        <pc:sldMkLst>
+          <pc:docMk/>
+          <pc:sldMk cId="4108073895" sldId="389"/>
+        </pc:sldMkLst>
+        <pc:spChg chg="mod">
+          <ac:chgData name="Eder Silva" userId="9b7f41b4-798d-40cf-8f87-8e33ae7a0417" providerId="ADAL" clId="{DFF9E84E-5922-4F26-9EAD-8AB4E668133E}" dt="2026-10-30T20:26:45.053" v="523" actId="1036"/>
+          <ac:spMkLst>
+            <pc:docMk/>
+            <pc:sldMk cId="4108073895" sldId="389"/>
+            <ac:spMk id="13" creationId="{3A197DA1-E0D9-3007-05B1-40755A52B32A}"/>
+          </ac:spMkLst>
+        </pc:spChg>
+        <pc:spChg chg="mod">
+          <ac:chgData name="Eder Silva" userId="9b7f41b4-798d-40cf-8f87-8e33ae7a0417" providerId="ADAL" clId="{DFF9E84E-5922-4F26-9EAD-8AB4E668133E}" dt="2026-10-30T20:26:45.053" v="523" actId="1036"/>
+          <ac:spMkLst>
+            <pc:docMk/>
+            <pc:sldMk cId="4108073895" sldId="389"/>
+            <ac:spMk id="14" creationId="{6761A01E-1D9C-37AB-D9E4-1458986255AD}"/>
+          </ac:spMkLst>
+        </pc:spChg>
+        <pc:spChg chg="mod">
+          <ac:chgData name="Eder Silva" userId="9b7f41b4-798d-40cf-8f87-8e33ae7a0417" providerId="ADAL" clId="{DFF9E84E-5922-4F26-9EAD-8AB4E668133E}" dt="2026-10-30T20:26:45.053" v="523" actId="1036"/>
+          <ac:spMkLst>
+            <pc:docMk/>
+            <pc:sldMk cId="4108073895" sldId="389"/>
+            <ac:spMk id="15" creationId="{EA08243C-E565-E99B-3C9F-5A9DD6E4A0BF}"/>
+          </ac:spMkLst>
+        </pc:spChg>
+        <pc:spChg chg="mod">
+          <ac:chgData name="Eder Silva" userId="9b7f41b4-798d-40cf-8f87-8e33ae7a0417" providerId="ADAL" clId="{DFF9E84E-5922-4F26-9EAD-8AB4E668133E}" dt="2026-10-30T20:26:45.053" v="523" actId="1036"/>
+          <ac:spMkLst>
+            <pc:docMk/>
+            <pc:sldMk cId="4108073895" sldId="389"/>
+            <ac:spMk id="16" creationId="{F81BD423-CAB6-FC58-A7EB-1C2CDD32DEFB}"/>
+          </ac:spMkLst>
+        </pc:spChg>
+      </pc:sldChg>
+      <pc:sldChg chg="modSp mod">
+        <pc:chgData name="Eder Silva" userId="9b7f41b4-798d-40cf-8f87-8e33ae7a0417" providerId="ADAL" clId="{DFF9E84E-5922-4F26-9EAD-8AB4E668133E}" dt="2026-10-30T20:26:49.955" v="524" actId="1076"/>
+        <pc:sldMkLst>
+          <pc:docMk/>
+          <pc:sldMk cId="3677305021" sldId="390"/>
+        </pc:sldMkLst>
+        <pc:spChg chg="mod">
+          <ac:chgData name="Eder Silva" userId="9b7f41b4-798d-40cf-8f87-8e33ae7a0417" providerId="ADAL" clId="{DFF9E84E-5922-4F26-9EAD-8AB4E668133E}" dt="2026-10-30T20:26:49.955" v="524" actId="1076"/>
+          <ac:spMkLst>
+            <pc:docMk/>
+            <pc:sldMk cId="3677305021" sldId="390"/>
+            <ac:spMk id="2" creationId="{00000000-0000-0000-0000-000000000000}"/>
           </ac:spMkLst>
         </pc:spChg>
       </pc:sldChg>
@@ -6634,7 +7337,7 @@
           <a:p>
             <a:fld id="{5BCAD085-E8A6-8845-BD4E-CB4CCA059FC4}" type="datetimeFigureOut">
               <a:rPr lang="en-US" smtClean="0"/>
-              <a:t>10/27/2026</a:t>
+              <a:t>10/30/2026</a:t>
             </a:fld>
             <a:endParaRPr lang="en-US"/>
           </a:p>
@@ -6802,7 +7505,7 @@
           <a:p>
             <a:fld id="{5BCAD085-E8A6-8845-BD4E-CB4CCA059FC4}" type="datetimeFigureOut">
               <a:rPr lang="en-US" smtClean="0"/>
-              <a:t>10/27/2026</a:t>
+              <a:t>10/30/2026</a:t>
             </a:fld>
             <a:endParaRPr lang="en-US"/>
           </a:p>
@@ -6980,7 +7683,7 @@
           <a:p>
             <a:fld id="{5BCAD085-E8A6-8845-BD4E-CB4CCA059FC4}" type="datetimeFigureOut">
               <a:rPr lang="en-US" smtClean="0"/>
-              <a:t>10/27/2026</a:t>
+              <a:t>10/30/2026</a:t>
             </a:fld>
             <a:endParaRPr lang="en-US"/>
           </a:p>
@@ -7148,7 +7851,7 @@
           <a:p>
             <a:fld id="{5BCAD085-E8A6-8845-BD4E-CB4CCA059FC4}" type="datetimeFigureOut">
               <a:rPr lang="en-US" smtClean="0"/>
-              <a:t>10/27/2026</a:t>
+              <a:t>10/30/2026</a:t>
             </a:fld>
             <a:endParaRPr lang="en-US"/>
           </a:p>
@@ -7393,7 +8096,7 @@
           <a:p>
             <a:fld id="{5BCAD085-E8A6-8845-BD4E-CB4CCA059FC4}" type="datetimeFigureOut">
               <a:rPr lang="en-US" smtClean="0"/>
-              <a:t>10/27/2026</a:t>
+              <a:t>10/30/2026</a:t>
             </a:fld>
             <a:endParaRPr lang="en-US"/>
           </a:p>
@@ -7678,7 +8381,7 @@
           <a:p>
             <a:fld id="{5BCAD085-E8A6-8845-BD4E-CB4CCA059FC4}" type="datetimeFigureOut">
               <a:rPr lang="en-US" smtClean="0"/>
-              <a:t>10/27/2026</a:t>
+              <a:t>10/30/2026</a:t>
             </a:fld>
             <a:endParaRPr lang="en-US"/>
           </a:p>
@@ -8097,7 +8800,7 @@
           <a:p>
             <a:fld id="{5BCAD085-E8A6-8845-BD4E-CB4CCA059FC4}" type="datetimeFigureOut">
               <a:rPr lang="en-US" smtClean="0"/>
-              <a:t>10/27/2026</a:t>
+              <a:t>10/30/2026</a:t>
             </a:fld>
             <a:endParaRPr lang="en-US"/>
           </a:p>
@@ -8214,7 +8917,7 @@
           <a:p>
             <a:fld id="{5BCAD085-E8A6-8845-BD4E-CB4CCA059FC4}" type="datetimeFigureOut">
               <a:rPr lang="en-US" smtClean="0"/>
-              <a:t>10/27/2026</a:t>
+              <a:t>10/30/2026</a:t>
             </a:fld>
             <a:endParaRPr lang="en-US"/>
           </a:p>
@@ -8309,7 +9012,7 @@
           <a:p>
             <a:fld id="{5BCAD085-E8A6-8845-BD4E-CB4CCA059FC4}" type="datetimeFigureOut">
               <a:rPr lang="en-US" smtClean="0"/>
-              <a:t>10/27/2026</a:t>
+              <a:t>10/30/2026</a:t>
             </a:fld>
             <a:endParaRPr lang="en-US"/>
           </a:p>
@@ -8584,7 +9287,7 @@
           <a:p>
             <a:fld id="{5BCAD085-E8A6-8845-BD4E-CB4CCA059FC4}" type="datetimeFigureOut">
               <a:rPr lang="en-US" smtClean="0"/>
-              <a:t>10/27/2026</a:t>
+              <a:t>10/30/2026</a:t>
             </a:fld>
             <a:endParaRPr lang="en-US"/>
           </a:p>
@@ -8836,7 +9539,7 @@
           <a:p>
             <a:fld id="{5BCAD085-E8A6-8845-BD4E-CB4CCA059FC4}" type="datetimeFigureOut">
               <a:rPr lang="en-US" smtClean="0"/>
-              <a:t>10/27/2026</a:t>
+              <a:t>10/30/2026</a:t>
             </a:fld>
             <a:endParaRPr lang="en-US"/>
           </a:p>
@@ -9047,7 +9750,7 @@
           <a:p>
             <a:fld id="{5BCAD085-E8A6-8845-BD4E-CB4CCA059FC4}" type="datetimeFigureOut">
               <a:rPr lang="en-US" smtClean="0"/>
-              <a:t>10/27/2026</a:t>
+              <a:t>10/30/2026</a:t>
             </a:fld>
             <a:endParaRPr lang="en-US"/>
           </a:p>
@@ -11276,7 +11979,7 @@
         </p:nvGraphicFramePr>
         <p:xfrm>
           <a:off x="640080" y="1049973"/>
-          <a:ext cx="10909300" cy="1778000"/>
+          <a:ext cx="10909300" cy="2678811"/>
         </p:xfrm>
         <a:graphic>
           <a:graphicData uri="http://schemas.openxmlformats.org/drawingml/2006/table">
@@ -12038,7 +12741,7 @@
         </p:nvSpPr>
         <p:spPr>
           <a:xfrm>
-            <a:off x="1005840" y="2377440"/>
+            <a:off x="1005840" y="2065508"/>
             <a:ext cx="10241280" cy="1446550"/>
           </a:xfrm>
           <a:prstGeom prst="rect">
@@ -12058,7 +12761,7 @@
               </a:lnSpc>
             </a:pPr>
             <a:r>
-              <a:rPr lang="pt-BR" sz="4400" b="1" i="0">
+              <a:rPr lang="pt-BR" sz="4400" b="1" i="0" dirty="0">
                 <a:solidFill>
                   <a:srgbClr val="FFFFFF"/>
                 </a:solidFill>
@@ -12066,7 +12769,7 @@
               </a:rPr>
               <a:t>Configuração, permissões e segurança dos dados</a:t>
             </a:r>
-            <a:endParaRPr sz="4400" b="1" i="0">
+            <a:endParaRPr sz="4400" b="1" i="0" dirty="0">
               <a:solidFill>
                 <a:srgbClr val="FFFFFF"/>
               </a:solidFill>
@@ -12360,7 +13063,7 @@
         </p:nvGraphicFramePr>
         <p:xfrm>
           <a:off x="640080" y="1049973"/>
-          <a:ext cx="10909300" cy="1270000"/>
+          <a:ext cx="10896600" cy="2049653"/>
         </p:xfrm>
         <a:graphic>
           <a:graphicData uri="http://schemas.openxmlformats.org/drawingml/2006/table">
@@ -13540,7 +14243,7 @@
         </p:nvGraphicFramePr>
         <p:xfrm>
           <a:off x="640080" y="1049973"/>
-          <a:ext cx="10909300" cy="1524000"/>
+          <a:ext cx="10909300" cy="2840990"/>
         </p:xfrm>
         <a:graphic>
           <a:graphicData uri="http://schemas.openxmlformats.org/drawingml/2006/table">
@@ -14601,7 +15304,7 @@
         </p:nvSpPr>
         <p:spPr>
           <a:xfrm>
-            <a:off x="640080" y="1049972"/>
+            <a:off x="576580" y="1564322"/>
             <a:ext cx="10909300" cy="356616"/>
           </a:xfrm>
           <a:prstGeom prst="rect">
@@ -14621,16 +15324,43 @@
               </a:lnSpc>
             </a:pPr>
             <a:r>
-              <a:rPr lang="pt-BR" sz="2000" b="1">
+              <a:rPr lang="pt-BR" sz="2000" b="1" dirty="0">
                 <a:solidFill>
                   <a:srgbClr val="B7472A"/>
                 </a:solidFill>
                 <a:latin typeface="Consolas" panose="020B0609020204030204" pitchFamily="49" charset="0"/>
               </a:rPr>
-              <a:t>.claude/settings.json</a:t>
-            </a:r>
-            <a:r>
-              <a:rPr lang="pt-BR" sz="2000" b="1">
+              <a:t>.</a:t>
+            </a:r>
+            <a:r>
+              <a:rPr lang="pt-BR" sz="2000" b="1" dirty="0" err="1">
+                <a:solidFill>
+                  <a:srgbClr val="B7472A"/>
+                </a:solidFill>
+                <a:latin typeface="Consolas" panose="020B0609020204030204" pitchFamily="49" charset="0"/>
+              </a:rPr>
+              <a:t>claude</a:t>
+            </a:r>
+            <a:r>
+              <a:rPr lang="pt-BR" sz="2000" b="1" dirty="0">
+                <a:solidFill>
+                  <a:srgbClr val="B7472A"/>
+                </a:solidFill>
+                <a:latin typeface="Consolas" panose="020B0609020204030204" pitchFamily="49" charset="0"/>
+              </a:rPr>
+              <a:t>/</a:t>
+            </a:r>
+            <a:r>
+              <a:rPr lang="pt-BR" sz="2000" b="1" dirty="0" err="1">
+                <a:solidFill>
+                  <a:srgbClr val="B7472A"/>
+                </a:solidFill>
+                <a:latin typeface="Consolas" panose="020B0609020204030204" pitchFamily="49" charset="0"/>
+              </a:rPr>
+              <a:t>settings.json</a:t>
+            </a:r>
+            <a:r>
+              <a:rPr lang="pt-BR" sz="2000" b="1" dirty="0">
                 <a:solidFill>
                   <a:srgbClr val="4A7C59"/>
                 </a:solidFill>
@@ -14638,7 +15368,7 @@
               </a:rPr>
               <a:t> da pasta de análise:</a:t>
             </a:r>
-            <a:endParaRPr lang="en-US" sz="2000" b="1">
+            <a:endParaRPr lang="en-US" sz="2000" b="1" dirty="0">
               <a:solidFill>
                 <a:srgbClr val="4A7C59"/>
               </a:solidFill>
@@ -14661,7 +15391,7 @@
         </p:nvSpPr>
         <p:spPr>
           <a:xfrm>
-            <a:off x="640080" y="1558988"/>
+            <a:off x="640080" y="1920938"/>
             <a:ext cx="10909300" cy="1905000"/>
           </a:xfrm>
           <a:prstGeom prst="roundRect">
@@ -14812,7 +15542,7 @@
         </p:nvSpPr>
         <p:spPr>
           <a:xfrm>
-            <a:off x="640080" y="1558988"/>
+            <a:off x="640080" y="1920938"/>
             <a:ext cx="76200" cy="1905000"/>
           </a:xfrm>
           <a:prstGeom prst="rect">
@@ -14883,7 +15613,7 @@
         </p:nvSpPr>
         <p:spPr>
           <a:xfrm>
-            <a:off x="640080" y="3616387"/>
+            <a:off x="640080" y="3978337"/>
             <a:ext cx="10909300" cy="2063496"/>
           </a:xfrm>
           <a:prstGeom prst="rect">
@@ -17122,7 +17852,7 @@
         </p:nvGraphicFramePr>
         <p:xfrm>
           <a:off x="640080" y="1053211"/>
-          <a:ext cx="10909300" cy="3302000"/>
+          <a:ext cx="10909300" cy="3907098"/>
         </p:xfrm>
         <a:graphic>
           <a:graphicData uri="http://schemas.openxmlformats.org/drawingml/2006/table">
@@ -18668,7 +19398,7 @@
         </p:nvSpPr>
         <p:spPr>
           <a:xfrm>
-            <a:off x="1005840" y="2377440"/>
+            <a:off x="916940" y="2085340"/>
             <a:ext cx="10241280" cy="1446550"/>
           </a:xfrm>
           <a:prstGeom prst="rect">
@@ -18688,7 +19418,7 @@
               </a:lnSpc>
             </a:pPr>
             <a:r>
-              <a:rPr lang="pt-BR" sz="4400" b="1" i="0">
+              <a:rPr lang="pt-BR" sz="4400" b="1" i="0" dirty="0">
                 <a:solidFill>
                   <a:srgbClr val="FFFFFF"/>
                 </a:solidFill>
@@ -18696,7 +19426,7 @@
               </a:rPr>
               <a:t>Pasta de projeto, CLAUDE.md e arquivos de contexto</a:t>
             </a:r>
-            <a:endParaRPr sz="4400" b="1" i="0">
+            <a:endParaRPr sz="4400" b="1" i="0" dirty="0">
               <a:solidFill>
                 <a:srgbClr val="FFFFFF"/>
               </a:solidFill>
@@ -20251,7 +20981,7 @@
         </p:nvGraphicFramePr>
         <p:xfrm>
           <a:off x="640080" y="2274824"/>
-          <a:ext cx="10909300" cy="1270000"/>
+          <a:ext cx="10909300" cy="1811274"/>
         </p:xfrm>
         <a:graphic>
           <a:graphicData uri="http://schemas.openxmlformats.org/drawingml/2006/table">
@@ -20985,7 +21715,7 @@
         </p:nvGraphicFramePr>
         <p:xfrm>
           <a:off x="640080" y="1052576"/>
-          <a:ext cx="10909300" cy="1524000"/>
+          <a:ext cx="10909300" cy="2364232"/>
         </p:xfrm>
         <a:graphic>
           <a:graphicData uri="http://schemas.openxmlformats.org/drawingml/2006/table">
@@ -21898,7 +22628,7 @@
         </p:nvSpPr>
         <p:spPr>
           <a:xfrm>
-            <a:off x="640080" y="1052576"/>
+            <a:off x="648970" y="1560576"/>
             <a:ext cx="10909300" cy="3390900"/>
           </a:xfrm>
           <a:prstGeom prst="roundRect">
@@ -22143,7 +22873,7 @@
         </p:nvSpPr>
         <p:spPr>
           <a:xfrm>
-            <a:off x="640080" y="1052576"/>
+            <a:off x="640080" y="1560576"/>
             <a:ext cx="76200" cy="3390900"/>
           </a:xfrm>
           <a:prstGeom prst="rect">
@@ -22388,14 +23118,14 @@
           <p:nvPr>
             <p:extLst>
               <p:ext uri="{D42A27DB-BD31-4B8C-83A1-F6EECF244321}">
-                <p14:modId xmlns:p14="http://schemas.microsoft.com/office/powerpoint/2010/main" val="3551303842"/>
+                <p14:modId xmlns:p14="http://schemas.microsoft.com/office/powerpoint/2010/main" val="3286895506"/>
               </p:ext>
             </p:extLst>
           </p:nvPr>
         </p:nvGraphicFramePr>
         <p:xfrm>
-          <a:off x="640080" y="1053211"/>
-          <a:ext cx="10909300" cy="2032000"/>
+          <a:off x="640080" y="1535811"/>
+          <a:ext cx="10909300" cy="3946906"/>
         </p:xfrm>
         <a:graphic>
           <a:graphicData uri="http://schemas.openxmlformats.org/drawingml/2006/table">
@@ -23370,7 +24100,7 @@
         </p:nvSpPr>
         <p:spPr>
           <a:xfrm>
-            <a:off x="640080" y="5152517"/>
+            <a:off x="640080" y="5635117"/>
             <a:ext cx="10909300" cy="502920"/>
           </a:xfrm>
           <a:prstGeom prst="roundRect">
@@ -23461,7 +24191,7 @@
         </p:nvSpPr>
         <p:spPr>
           <a:xfrm>
-            <a:off x="640080" y="5152517"/>
+            <a:off x="640080" y="5635117"/>
             <a:ext cx="76200" cy="502920"/>
           </a:xfrm>
           <a:prstGeom prst="rect">
@@ -23705,7 +24435,7 @@
         </p:nvSpPr>
         <p:spPr>
           <a:xfrm>
-            <a:off x="640080" y="1053210"/>
+            <a:off x="640080" y="1694560"/>
             <a:ext cx="10909300" cy="1783080"/>
           </a:xfrm>
           <a:prstGeom prst="rect">
@@ -23821,7 +24551,7 @@
         </p:nvSpPr>
         <p:spPr>
           <a:xfrm>
-            <a:off x="640080" y="2988690"/>
+            <a:off x="640080" y="3630040"/>
             <a:ext cx="10909300" cy="533400"/>
           </a:xfrm>
           <a:prstGeom prst="roundRect">
@@ -23912,7 +24642,7 @@
         </p:nvSpPr>
         <p:spPr>
           <a:xfrm>
-            <a:off x="640080" y="2988690"/>
+            <a:off x="640080" y="3630040"/>
             <a:ext cx="76200" cy="533400"/>
           </a:xfrm>
           <a:prstGeom prst="rect">
@@ -23983,7 +24713,7 @@
         </p:nvSpPr>
         <p:spPr>
           <a:xfrm>
-            <a:off x="640080" y="3674489"/>
+            <a:off x="640080" y="4315839"/>
             <a:ext cx="10909300" cy="637032"/>
           </a:xfrm>
           <a:prstGeom prst="rect">
@@ -25068,7 +25798,7 @@
         </p:nvSpPr>
         <p:spPr>
           <a:xfrm>
-            <a:off x="381000" y="1053211"/>
+            <a:off x="381000" y="1383411"/>
             <a:ext cx="2164080" cy="977837"/>
           </a:xfrm>
           <a:prstGeom prst="roundRect">
@@ -25186,7 +25916,7 @@
         </p:nvSpPr>
         <p:spPr>
           <a:xfrm>
-            <a:off x="2697480" y="1053211"/>
+            <a:off x="2697480" y="1383411"/>
             <a:ext cx="2164080" cy="977837"/>
           </a:xfrm>
           <a:prstGeom prst="roundRect">
@@ -25304,7 +26034,7 @@
         </p:nvSpPr>
         <p:spPr>
           <a:xfrm>
-            <a:off x="5013960" y="1053212"/>
+            <a:off x="5013960" y="1383412"/>
             <a:ext cx="2164079" cy="977837"/>
           </a:xfrm>
           <a:prstGeom prst="roundRect">
@@ -25422,7 +26152,7 @@
         </p:nvSpPr>
         <p:spPr>
           <a:xfrm>
-            <a:off x="7330440" y="1053212"/>
+            <a:off x="7330440" y="1383412"/>
             <a:ext cx="2164080" cy="977837"/>
           </a:xfrm>
           <a:prstGeom prst="roundRect">
@@ -25534,7 +26264,7 @@
         </p:nvSpPr>
         <p:spPr>
           <a:xfrm>
-            <a:off x="9646920" y="1053211"/>
+            <a:off x="9646920" y="1383411"/>
             <a:ext cx="2164080" cy="977837"/>
           </a:xfrm>
           <a:prstGeom prst="roundRect">
@@ -25652,7 +26382,7 @@
         </p:nvSpPr>
         <p:spPr>
           <a:xfrm>
-            <a:off x="2583180" y="1453230"/>
+            <a:off x="2583180" y="1783430"/>
             <a:ext cx="76200" cy="177800"/>
           </a:xfrm>
           <a:prstGeom prst="rightArrow">
@@ -25723,7 +26453,7 @@
         </p:nvSpPr>
         <p:spPr>
           <a:xfrm>
-            <a:off x="4899660" y="1453230"/>
+            <a:off x="4899660" y="1783430"/>
             <a:ext cx="76200" cy="177800"/>
           </a:xfrm>
           <a:prstGeom prst="rightArrow">
@@ -25794,7 +26524,7 @@
         </p:nvSpPr>
         <p:spPr>
           <a:xfrm>
-            <a:off x="7216140" y="1453230"/>
+            <a:off x="7216140" y="1783430"/>
             <a:ext cx="76200" cy="177800"/>
           </a:xfrm>
           <a:prstGeom prst="rightArrow">
@@ -25865,7 +26595,7 @@
         </p:nvSpPr>
         <p:spPr>
           <a:xfrm>
-            <a:off x="9532620" y="1453230"/>
+            <a:off x="9532620" y="1783430"/>
             <a:ext cx="76200" cy="177800"/>
           </a:xfrm>
           <a:prstGeom prst="rightArrow">
@@ -25936,7 +26666,7 @@
         </p:nvSpPr>
         <p:spPr>
           <a:xfrm>
-            <a:off x="640080" y="2234248"/>
+            <a:off x="640080" y="2564448"/>
             <a:ext cx="10909300" cy="1350264"/>
           </a:xfrm>
           <a:prstGeom prst="rect">
@@ -26234,7 +26964,7 @@
         </p:nvSpPr>
         <p:spPr>
           <a:xfrm>
-            <a:off x="640080" y="1049973"/>
+            <a:off x="640080" y="1500823"/>
             <a:ext cx="10909300" cy="2929128"/>
           </a:xfrm>
           <a:prstGeom prst="rect">
@@ -26265,16 +26995,25 @@
               <a:buChar char="•"/>
             </a:pPr>
             <a:r>
-              <a:rPr lang="pt-BR" sz="2000" b="1">
+              <a:rPr lang="pt-BR" sz="2000" b="1" dirty="0">
                 <a:solidFill>
                   <a:srgbClr val="4A7C59"/>
                 </a:solidFill>
                 <a:latin typeface="DejaVu Sans"/>
               </a:rPr>
-              <a:t>VS Code</a:t>
-            </a:r>
-            <a:r>
-              <a:rPr lang="pt-BR" sz="2000">
+              <a:t>VS </a:t>
+            </a:r>
+            <a:r>
+              <a:rPr lang="pt-BR" sz="2000" b="1" dirty="0" err="1">
+                <a:solidFill>
+                  <a:srgbClr val="4A7C59"/>
+                </a:solidFill>
+                <a:latin typeface="DejaVu Sans"/>
+              </a:rPr>
+              <a:t>Code</a:t>
+            </a:r>
+            <a:r>
+              <a:rPr lang="pt-BR" sz="2000" dirty="0">
                 <a:solidFill>
                   <a:srgbClr val="2E3A2F"/>
                 </a:solidFill>
@@ -26283,7 +27022,7 @@
               <a:t>: indicador de modo → </a:t>
             </a:r>
             <a:r>
-              <a:rPr lang="pt-BR" sz="2000" b="1">
+              <a:rPr lang="pt-BR" sz="2000" b="1" dirty="0" err="1">
                 <a:solidFill>
                   <a:srgbClr val="4A7C59"/>
                 </a:solidFill>
@@ -26292,7 +27031,7 @@
               <a:t>Plan</a:t>
             </a:r>
             <a:r>
-              <a:rPr lang="pt-BR" sz="2000">
+              <a:rPr lang="pt-BR" sz="2000" dirty="0">
                 <a:solidFill>
                   <a:srgbClr val="2E3A2F"/>
                 </a:solidFill>
@@ -26301,16 +27040,25 @@
               <a:t>, ou digite </a:t>
             </a:r>
             <a:r>
-              <a:rPr lang="pt-BR" sz="2000" b="1">
+              <a:rPr lang="pt-BR" sz="2000" b="1" dirty="0">
                 <a:solidFill>
                   <a:srgbClr val="B7472A"/>
                 </a:solidFill>
                 <a:latin typeface="Consolas" panose="020B0609020204030204" pitchFamily="49" charset="0"/>
               </a:rPr>
-              <a:t>/plan</a:t>
-            </a:r>
-            <a:r>
-              <a:rPr lang="pt-BR" sz="2000">
+              <a:t>/</a:t>
+            </a:r>
+            <a:r>
+              <a:rPr lang="pt-BR" sz="2000" b="1" dirty="0" err="1">
+                <a:solidFill>
+                  <a:srgbClr val="B7472A"/>
+                </a:solidFill>
+                <a:latin typeface="Consolas" panose="020B0609020204030204" pitchFamily="49" charset="0"/>
+              </a:rPr>
+              <a:t>plan</a:t>
+            </a:r>
+            <a:r>
+              <a:rPr lang="pt-BR" sz="2000" dirty="0">
                 <a:solidFill>
                   <a:srgbClr val="2E3A2F"/>
                 </a:solidFill>
@@ -26337,7 +27085,7 @@
               <a:buChar char="•"/>
             </a:pPr>
             <a:r>
-              <a:rPr lang="pt-BR" sz="2000" b="1">
+              <a:rPr lang="pt-BR" sz="2000" b="1" dirty="0">
                 <a:solidFill>
                   <a:srgbClr val="4A7C59"/>
                 </a:solidFill>
@@ -26346,7 +27094,7 @@
               <a:t>Terminal</a:t>
             </a:r>
             <a:r>
-              <a:rPr lang="pt-BR" sz="2000">
+              <a:rPr lang="pt-BR" sz="2000" dirty="0">
                 <a:solidFill>
                   <a:srgbClr val="2E3A2F"/>
                 </a:solidFill>
@@ -26355,7 +27103,7 @@
               <a:t>: </a:t>
             </a:r>
             <a:r>
-              <a:rPr lang="pt-BR" sz="2000" b="1">
+              <a:rPr lang="pt-BR" sz="2000" b="1" dirty="0" err="1">
                 <a:solidFill>
                   <a:srgbClr val="B7472A"/>
                 </a:solidFill>
@@ -26364,7 +27112,7 @@
               <a:t>Shift+Tab</a:t>
             </a:r>
             <a:r>
-              <a:rPr lang="pt-BR" sz="2000">
+              <a:rPr lang="pt-BR" sz="2000" dirty="0">
                 <a:solidFill>
                   <a:srgbClr val="2E3A2F"/>
                 </a:solidFill>
@@ -26373,16 +27121,52 @@
               <a:t> até aparecer </a:t>
             </a:r>
             <a:r>
-              <a:rPr lang="pt-BR" sz="2000" b="1">
+              <a:rPr lang="pt-BR" sz="2000" b="1" dirty="0" err="1">
                 <a:solidFill>
                   <a:srgbClr val="B7472A"/>
                 </a:solidFill>
                 <a:latin typeface="Consolas" panose="020B0609020204030204" pitchFamily="49" charset="0"/>
               </a:rPr>
-              <a:t>plan mode on</a:t>
-            </a:r>
-            <a:r>
-              <a:rPr lang="pt-BR" sz="2000">
+              <a:t>plan</a:t>
+            </a:r>
+            <a:r>
+              <a:rPr lang="pt-BR" sz="2000" b="1" dirty="0">
+                <a:solidFill>
+                  <a:srgbClr val="B7472A"/>
+                </a:solidFill>
+                <a:latin typeface="Consolas" panose="020B0609020204030204" pitchFamily="49" charset="0"/>
+              </a:rPr>
+              <a:t> </a:t>
+            </a:r>
+            <a:r>
+              <a:rPr lang="pt-BR" sz="2000" b="1" dirty="0" err="1">
+                <a:solidFill>
+                  <a:srgbClr val="B7472A"/>
+                </a:solidFill>
+                <a:latin typeface="Consolas" panose="020B0609020204030204" pitchFamily="49" charset="0"/>
+              </a:rPr>
+              <a:t>mode</a:t>
+            </a:r>
+            <a:r>
+              <a:rPr lang="pt-BR" sz="2000" b="1" dirty="0">
+                <a:solidFill>
+                  <a:srgbClr val="B7472A"/>
+                </a:solidFill>
+                <a:latin typeface="Consolas" panose="020B0609020204030204" pitchFamily="49" charset="0"/>
+              </a:rPr>
+              <a:t> </a:t>
+            </a:r>
+            <a:r>
+              <a:rPr lang="pt-BR" sz="2000" b="1" dirty="0" err="1">
+                <a:solidFill>
+                  <a:srgbClr val="B7472A"/>
+                </a:solidFill>
+                <a:latin typeface="Consolas" panose="020B0609020204030204" pitchFamily="49" charset="0"/>
+              </a:rPr>
+              <a:t>on</a:t>
+            </a:r>
+            <a:r>
+              <a:rPr lang="pt-BR" sz="2000" dirty="0">
                 <a:solidFill>
                   <a:srgbClr val="2E3A2F"/>
                 </a:solidFill>
@@ -26391,16 +27175,52 @@
               <a:t>, ou </a:t>
             </a:r>
             <a:r>
-              <a:rPr lang="pt-BR" sz="2000" b="1">
+              <a:rPr lang="pt-BR" sz="2000" b="1" dirty="0" err="1">
                 <a:solidFill>
                   <a:srgbClr val="B7472A"/>
                 </a:solidFill>
                 <a:latin typeface="Consolas" panose="020B0609020204030204" pitchFamily="49" charset="0"/>
               </a:rPr>
-              <a:t>claude --permission-mode plan</a:t>
-            </a:r>
-            <a:r>
-              <a:rPr lang="pt-BR" sz="2000">
+              <a:t>claude</a:t>
+            </a:r>
+            <a:r>
+              <a:rPr lang="pt-BR" sz="2000" b="1" dirty="0">
+                <a:solidFill>
+                  <a:srgbClr val="B7472A"/>
+                </a:solidFill>
+                <a:latin typeface="Consolas" panose="020B0609020204030204" pitchFamily="49" charset="0"/>
+              </a:rPr>
+              <a:t> --</a:t>
+            </a:r>
+            <a:r>
+              <a:rPr lang="pt-BR" sz="2000" b="1" dirty="0" err="1">
+                <a:solidFill>
+                  <a:srgbClr val="B7472A"/>
+                </a:solidFill>
+                <a:latin typeface="Consolas" panose="020B0609020204030204" pitchFamily="49" charset="0"/>
+              </a:rPr>
+              <a:t>permission-mode</a:t>
+            </a:r>
+            <a:r>
+              <a:rPr lang="pt-BR" sz="2000" b="1" dirty="0">
+                <a:solidFill>
+                  <a:srgbClr val="B7472A"/>
+                </a:solidFill>
+                <a:latin typeface="Consolas" panose="020B0609020204030204" pitchFamily="49" charset="0"/>
+              </a:rPr>
+              <a:t> </a:t>
+            </a:r>
+            <a:r>
+              <a:rPr lang="pt-BR" sz="2000" b="1" dirty="0" err="1">
+                <a:solidFill>
+                  <a:srgbClr val="B7472A"/>
+                </a:solidFill>
+                <a:latin typeface="Consolas" panose="020B0609020204030204" pitchFamily="49" charset="0"/>
+              </a:rPr>
+              <a:t>plan</a:t>
+            </a:r>
+            <a:r>
+              <a:rPr lang="pt-BR" sz="2000" dirty="0">
                 <a:solidFill>
                   <a:srgbClr val="2E3A2F"/>
                 </a:solidFill>
@@ -26427,16 +27247,34 @@
               <a:buChar char="•"/>
             </a:pPr>
             <a:r>
-              <a:rPr lang="pt-BR" sz="2000">
+              <a:rPr lang="pt-BR" sz="2000" dirty="0">
                 <a:solidFill>
                   <a:srgbClr val="2E3A2F"/>
                 </a:solidFill>
                 <a:latin typeface="DejaVu Sans"/>
               </a:rPr>
-              <a:t>No modo Plan o agente lê, pesquisa e pergunta, mas </a:t>
-            </a:r>
-            <a:r>
-              <a:rPr lang="pt-BR" sz="2000" b="1">
+              <a:t>No modo </a:t>
+            </a:r>
+            <a:r>
+              <a:rPr lang="pt-BR" sz="2000" dirty="0" err="1">
+                <a:solidFill>
+                  <a:srgbClr val="2E3A2F"/>
+                </a:solidFill>
+                <a:latin typeface="DejaVu Sans"/>
+              </a:rPr>
+              <a:t>Plan</a:t>
+            </a:r>
+            <a:r>
+              <a:rPr lang="pt-BR" sz="2000" dirty="0">
+                <a:solidFill>
+                  <a:srgbClr val="2E3A2F"/>
+                </a:solidFill>
+                <a:latin typeface="DejaVu Sans"/>
+              </a:rPr>
+              <a:t> o agente lê, pesquisa e pergunta, mas </a:t>
+            </a:r>
+            <a:r>
+              <a:rPr lang="pt-BR" sz="2000" b="1" dirty="0">
                 <a:solidFill>
                   <a:srgbClr val="4A7C59"/>
                 </a:solidFill>
@@ -26445,7 +27283,7 @@
               <a:t>não edita</a:t>
             </a:r>
             <a:r>
-              <a:rPr lang="pt-BR" sz="2000">
+              <a:rPr lang="pt-BR" sz="2000" dirty="0">
                 <a:solidFill>
                   <a:srgbClr val="2E3A2F"/>
                 </a:solidFill>
@@ -26472,16 +27310,52 @@
               <a:buChar char="•"/>
             </a:pPr>
             <a:r>
-              <a:rPr lang="pt-BR" sz="2000">
+              <a:rPr lang="pt-BR" sz="2000" dirty="0">
                 <a:solidFill>
                   <a:srgbClr val="2E3A2F"/>
                 </a:solidFill>
                 <a:latin typeface="DejaVu Sans"/>
               </a:rPr>
-              <a:t>No VS Code, o plano abre como documento Markdown: você pode comentar trechos antes de aprovar. No terminal, </a:t>
-            </a:r>
-            <a:r>
-              <a:rPr lang="pt-BR" sz="2000" b="1">
+              <a:t>No VS </a:t>
+            </a:r>
+            <a:r>
+              <a:rPr lang="pt-BR" sz="2000" dirty="0" err="1">
+                <a:solidFill>
+                  <a:srgbClr val="2E3A2F"/>
+                </a:solidFill>
+                <a:latin typeface="DejaVu Sans"/>
+              </a:rPr>
+              <a:t>Code</a:t>
+            </a:r>
+            <a:r>
+              <a:rPr lang="pt-BR" sz="2000" dirty="0">
+                <a:solidFill>
+                  <a:srgbClr val="2E3A2F"/>
+                </a:solidFill>
+                <a:latin typeface="DejaVu Sans"/>
+              </a:rPr>
+              <a:t>, o plano abre como documento </a:t>
+            </a:r>
+            <a:r>
+              <a:rPr lang="pt-BR" sz="2000" dirty="0" err="1">
+                <a:solidFill>
+                  <a:srgbClr val="2E3A2F"/>
+                </a:solidFill>
+                <a:latin typeface="DejaVu Sans"/>
+              </a:rPr>
+              <a:t>Markdown</a:t>
+            </a:r>
+            <a:r>
+              <a:rPr lang="pt-BR" sz="2000" dirty="0">
+                <a:solidFill>
+                  <a:srgbClr val="2E3A2F"/>
+                </a:solidFill>
+                <a:latin typeface="DejaVu Sans"/>
+              </a:rPr>
+              <a:t>: você pode comentar trechos antes de aprovar. No terminal, </a:t>
+            </a:r>
+            <a:r>
+              <a:rPr lang="pt-BR" sz="2000" b="1" dirty="0" err="1">
                 <a:solidFill>
                   <a:srgbClr val="B7472A"/>
                 </a:solidFill>
@@ -26490,7 +27364,7 @@
               <a:t>Ctrl+G</a:t>
             </a:r>
             <a:r>
-              <a:rPr lang="pt-BR" sz="2000">
+              <a:rPr lang="pt-BR" sz="2000" dirty="0">
                 <a:solidFill>
                   <a:srgbClr val="2E3A2F"/>
                 </a:solidFill>
@@ -26517,7 +27391,7 @@
               <a:buChar char="•"/>
             </a:pPr>
             <a:r>
-              <a:rPr lang="pt-BR" sz="2000">
+              <a:rPr lang="pt-BR" sz="2000" dirty="0">
                 <a:solidFill>
                   <a:srgbClr val="2E3A2F"/>
                 </a:solidFill>
@@ -26525,7 +27399,7 @@
               </a:rPr>
               <a:t>Aprovar o plano libera a execução; rejeitar com comentários gera uma nova versão.</a:t>
             </a:r>
-            <a:endParaRPr lang="en-US" sz="2000">
+            <a:endParaRPr lang="en-US" sz="2000" dirty="0">
               <a:solidFill>
                 <a:srgbClr val="2E3A2F"/>
               </a:solidFill>
@@ -26721,7 +27595,7 @@
         </p:nvSpPr>
         <p:spPr>
           <a:xfrm>
-            <a:off x="640080" y="1053211"/>
+            <a:off x="640080" y="1548511"/>
             <a:ext cx="10909300" cy="1219200"/>
           </a:xfrm>
           <a:prstGeom prst="roundRect">
@@ -26845,7 +27719,7 @@
         </p:nvSpPr>
         <p:spPr>
           <a:xfrm>
-            <a:off x="640080" y="1053211"/>
+            <a:off x="640080" y="1548511"/>
             <a:ext cx="76200" cy="1219200"/>
           </a:xfrm>
           <a:prstGeom prst="rect">
@@ -26916,7 +27790,7 @@
         </p:nvSpPr>
         <p:spPr>
           <a:xfrm>
-            <a:off x="640080" y="2424811"/>
+            <a:off x="640080" y="3161411"/>
             <a:ext cx="10909300" cy="1350264"/>
           </a:xfrm>
           <a:prstGeom prst="rect">
@@ -27240,7 +28114,7 @@
         </p:nvGraphicFramePr>
         <p:xfrm>
           <a:off x="640080" y="1053211"/>
-          <a:ext cx="10909300" cy="2286000"/>
+          <a:ext cx="10909300" cy="3069590"/>
         </p:xfrm>
         <a:graphic>
           <a:graphicData uri="http://schemas.openxmlformats.org/drawingml/2006/table">
@@ -28223,7 +29097,7 @@
         </p:nvSpPr>
         <p:spPr>
           <a:xfrm>
-            <a:off x="640080" y="1053211"/>
+            <a:off x="640080" y="1643761"/>
             <a:ext cx="5308600" cy="342583"/>
           </a:xfrm>
           <a:prstGeom prst="rect">
@@ -28268,7 +29142,7 @@
         </p:nvSpPr>
         <p:spPr>
           <a:xfrm>
-            <a:off x="640080" y="1548194"/>
+            <a:off x="640080" y="2138744"/>
             <a:ext cx="5308600" cy="1053148"/>
           </a:xfrm>
           <a:prstGeom prst="roundRect">
@@ -28364,7 +29238,7 @@
         </p:nvSpPr>
         <p:spPr>
           <a:xfrm>
-            <a:off x="640080" y="1548194"/>
+            <a:off x="640080" y="2138744"/>
             <a:ext cx="63500" cy="1053148"/>
           </a:xfrm>
           <a:prstGeom prst="rect">
@@ -28435,7 +29309,7 @@
         </p:nvSpPr>
         <p:spPr>
           <a:xfrm>
-            <a:off x="6240780" y="1053211"/>
+            <a:off x="6240780" y="1643761"/>
             <a:ext cx="5308600" cy="342583"/>
           </a:xfrm>
           <a:prstGeom prst="rect">
@@ -28480,7 +29354,7 @@
         </p:nvSpPr>
         <p:spPr>
           <a:xfrm>
-            <a:off x="6240780" y="1548194"/>
+            <a:off x="6240780" y="2138744"/>
             <a:ext cx="5308600" cy="2512060"/>
           </a:xfrm>
           <a:prstGeom prst="rect">
@@ -28614,7 +29488,7 @@
         </p:nvSpPr>
         <p:spPr>
           <a:xfrm>
-            <a:off x="6240780" y="4212654"/>
+            <a:off x="6240780" y="4803204"/>
             <a:ext cx="5308600" cy="1319530"/>
           </a:xfrm>
           <a:prstGeom prst="roundRect">
@@ -28710,7 +29584,7 @@
         </p:nvSpPr>
         <p:spPr>
           <a:xfrm>
-            <a:off x="6240780" y="4212654"/>
+            <a:off x="6240780" y="4803204"/>
             <a:ext cx="63500" cy="1319530"/>
           </a:xfrm>
           <a:prstGeom prst="rect">
@@ -29523,7 +30397,7 @@
         </p:nvGraphicFramePr>
         <p:xfrm>
           <a:off x="640080" y="1049973"/>
-          <a:ext cx="10909300" cy="762000"/>
+          <a:ext cx="10909300" cy="1658874"/>
         </p:xfrm>
         <a:graphic>
           <a:graphicData uri="http://schemas.openxmlformats.org/drawingml/2006/table">
@@ -30194,7 +31068,7 @@
         </p:nvSpPr>
         <p:spPr>
           <a:xfrm>
-            <a:off x="640080" y="1053211"/>
+            <a:off x="640080" y="1694561"/>
             <a:ext cx="10909300" cy="3233928"/>
           </a:xfrm>
           <a:prstGeom prst="rect">
@@ -30619,14 +31493,14 @@
           <p:nvPr>
             <p:extLst>
               <p:ext uri="{D42A27DB-BD31-4B8C-83A1-F6EECF244321}">
-                <p14:modId xmlns:p14="http://schemas.microsoft.com/office/powerpoint/2010/main" val="2884279837"/>
+                <p14:modId xmlns:p14="http://schemas.microsoft.com/office/powerpoint/2010/main" val="2218276331"/>
               </p:ext>
             </p:extLst>
           </p:nvPr>
         </p:nvGraphicFramePr>
         <p:xfrm>
-          <a:off x="640080" y="1053211"/>
-          <a:ext cx="10909300" cy="2286000"/>
+          <a:off x="640080" y="1345311"/>
+          <a:ext cx="10909300" cy="3069590"/>
         </p:xfrm>
         <a:graphic>
           <a:graphicData uri="http://schemas.openxmlformats.org/drawingml/2006/table">
@@ -31373,7 +32247,7 @@
         </p:nvSpPr>
         <p:spPr>
           <a:xfrm>
-            <a:off x="640080" y="4275200"/>
+            <a:off x="640080" y="4567300"/>
             <a:ext cx="10909300" cy="356616"/>
           </a:xfrm>
           <a:prstGeom prst="rect">
@@ -31605,7 +32479,7 @@
         </p:nvGraphicFramePr>
         <p:xfrm>
           <a:off x="640080" y="1053211"/>
-          <a:ext cx="10909300" cy="1524000"/>
+          <a:ext cx="10909300" cy="2364232"/>
         </p:xfrm>
         <a:graphic>
           <a:graphicData uri="http://schemas.openxmlformats.org/drawingml/2006/table">
@@ -32664,14 +33538,14 @@
           <p:nvPr>
             <p:extLst>
               <p:ext uri="{D42A27DB-BD31-4B8C-83A1-F6EECF244321}">
-                <p14:modId xmlns:p14="http://schemas.microsoft.com/office/powerpoint/2010/main" val="1066927927"/>
+                <p14:modId xmlns:p14="http://schemas.microsoft.com/office/powerpoint/2010/main" val="1322283962"/>
               </p:ext>
             </p:extLst>
           </p:nvPr>
         </p:nvGraphicFramePr>
         <p:xfrm>
-          <a:off x="640080" y="1053211"/>
-          <a:ext cx="10909300" cy="1270000"/>
+          <a:off x="640080" y="1592961"/>
+          <a:ext cx="10909300" cy="2049653"/>
         </p:xfrm>
         <a:graphic>
           <a:graphicData uri="http://schemas.openxmlformats.org/drawingml/2006/table">
@@ -33271,7 +34145,7 @@
         </p:nvSpPr>
         <p:spPr>
           <a:xfrm>
-            <a:off x="640080" y="3255264"/>
+            <a:off x="640080" y="3795014"/>
             <a:ext cx="10909300" cy="1350264"/>
           </a:xfrm>
           <a:prstGeom prst="rect">
@@ -33552,14 +34426,14 @@
           <p:nvPr>
             <p:extLst>
               <p:ext uri="{D42A27DB-BD31-4B8C-83A1-F6EECF244321}">
-                <p14:modId xmlns:p14="http://schemas.microsoft.com/office/powerpoint/2010/main" val="1074177593"/>
+                <p14:modId xmlns:p14="http://schemas.microsoft.com/office/powerpoint/2010/main" val="3220586331"/>
               </p:ext>
             </p:extLst>
           </p:nvPr>
         </p:nvGraphicFramePr>
         <p:xfrm>
-          <a:off x="640080" y="1053211"/>
-          <a:ext cx="10909300" cy="1016000"/>
+          <a:off x="640080" y="1694561"/>
+          <a:ext cx="10896600" cy="1258316"/>
         </p:xfrm>
         <a:graphic>
           <a:graphicData uri="http://schemas.openxmlformats.org/drawingml/2006/table">
@@ -34449,7 +35323,7 @@
         </p:nvSpPr>
         <p:spPr>
           <a:xfrm>
-            <a:off x="640080" y="2463927"/>
+            <a:off x="640080" y="3105277"/>
             <a:ext cx="10909300" cy="1222248"/>
           </a:xfrm>
           <a:prstGeom prst="rect">
@@ -34615,7 +35489,7 @@
         </p:nvSpPr>
         <p:spPr>
           <a:xfrm>
-            <a:off x="1005840" y="2377440"/>
+            <a:off x="1005840" y="2218690"/>
             <a:ext cx="10241280" cy="769441"/>
           </a:xfrm>
           <a:prstGeom prst="rect">
@@ -34635,7 +35509,7 @@
               </a:lnSpc>
             </a:pPr>
             <a:r>
-              <a:rPr lang="pt-BR" sz="4400" b="1" i="0">
+              <a:rPr lang="pt-BR" sz="4400" b="1" i="0" dirty="0">
                 <a:solidFill>
                   <a:srgbClr val="FFFFFF"/>
                 </a:solidFill>
@@ -34643,7 +35517,7 @@
               </a:rPr>
               <a:t>Gerenciar o contexto das sessões</a:t>
             </a:r>
-            <a:endParaRPr sz="4400" b="1" i="0">
+            <a:endParaRPr sz="4400" b="1" i="0" dirty="0">
               <a:solidFill>
                 <a:srgbClr val="FFFFFF"/>
               </a:solidFill>
@@ -34929,7 +35803,7 @@
         </p:nvSpPr>
         <p:spPr>
           <a:xfrm>
-            <a:off x="640080" y="1053211"/>
+            <a:off x="640080" y="1643761"/>
             <a:ext cx="10909300" cy="2776728"/>
           </a:xfrm>
           <a:prstGeom prst="rect">
@@ -35298,7 +36172,7 @@
         </p:nvGraphicFramePr>
         <p:xfrm>
           <a:off x="640080" y="1049973"/>
-          <a:ext cx="10909300" cy="1524000"/>
+          <a:ext cx="10909300" cy="2840990"/>
         </p:xfrm>
         <a:graphic>
           <a:graphicData uri="http://schemas.openxmlformats.org/drawingml/2006/table">
@@ -36198,7 +37072,7 @@
         </p:nvSpPr>
         <p:spPr>
           <a:xfrm>
-            <a:off x="640080" y="1053211"/>
+            <a:off x="640080" y="1624711"/>
             <a:ext cx="10909300" cy="3489960"/>
           </a:xfrm>
           <a:prstGeom prst="rect">
@@ -36472,7 +37346,7 @@
         </p:nvSpPr>
         <p:spPr>
           <a:xfrm>
-            <a:off x="1005840" y="2377440"/>
+            <a:off x="923290" y="2142490"/>
             <a:ext cx="10241280" cy="769441"/>
           </a:xfrm>
           <a:prstGeom prst="rect">
@@ -36492,15 +37366,51 @@
               </a:lnSpc>
             </a:pPr>
             <a:r>
-              <a:rPr lang="en-US" sz="4400" b="1" i="0">
+              <a:rPr lang="en-US" sz="4400" b="1" i="0" dirty="0" err="1">
                 <a:solidFill>
                   <a:srgbClr val="FFFFFF"/>
                 </a:solidFill>
                 <a:latin typeface="DejaVu Serif"/>
               </a:rPr>
-              <a:t>Subagentes: orientando e orientador</a:t>
-            </a:r>
-            <a:endParaRPr sz="4400" b="1" i="0">
+              <a:t>Subagentes</a:t>
+            </a:r>
+            <a:r>
+              <a:rPr lang="en-US" sz="4400" b="1" i="0" dirty="0">
+                <a:solidFill>
+                  <a:srgbClr val="FFFFFF"/>
+                </a:solidFill>
+                <a:latin typeface="DejaVu Serif"/>
+              </a:rPr>
+              <a:t>: </a:t>
+            </a:r>
+            <a:r>
+              <a:rPr lang="en-US" sz="4400" b="1" i="0" dirty="0" err="1">
+                <a:solidFill>
+                  <a:srgbClr val="FFFFFF"/>
+                </a:solidFill>
+                <a:latin typeface="DejaVu Serif"/>
+              </a:rPr>
+              <a:t>orientando</a:t>
+            </a:r>
+            <a:r>
+              <a:rPr lang="en-US" sz="4400" b="1" i="0" dirty="0">
+                <a:solidFill>
+                  <a:srgbClr val="FFFFFF"/>
+                </a:solidFill>
+                <a:latin typeface="DejaVu Serif"/>
+              </a:rPr>
+              <a:t> e </a:t>
+            </a:r>
+            <a:r>
+              <a:rPr lang="en-US" sz="4400" b="1" i="0" dirty="0" err="1">
+                <a:solidFill>
+                  <a:srgbClr val="FFFFFF"/>
+                </a:solidFill>
+                <a:latin typeface="DejaVu Serif"/>
+              </a:rPr>
+              <a:t>orientador</a:t>
+            </a:r>
+            <a:endParaRPr sz="4400" b="1" i="0" dirty="0">
               <a:solidFill>
                 <a:srgbClr val="FFFFFF"/>
               </a:solidFill>
@@ -39972,7 +40882,7 @@
         </p:nvSpPr>
         <p:spPr>
           <a:xfrm>
-            <a:off x="381000" y="1053210"/>
+            <a:off x="381000" y="1643760"/>
             <a:ext cx="2164080" cy="1202182"/>
           </a:xfrm>
           <a:prstGeom prst="roundRect">
@@ -40090,7 +41000,7 @@
         </p:nvSpPr>
         <p:spPr>
           <a:xfrm>
-            <a:off x="2697480" y="1053211"/>
+            <a:off x="2697480" y="1643761"/>
             <a:ext cx="2164080" cy="1202182"/>
           </a:xfrm>
           <a:prstGeom prst="roundRect">
@@ -40208,7 +41118,7 @@
         </p:nvSpPr>
         <p:spPr>
           <a:xfrm>
-            <a:off x="5013960" y="1053211"/>
+            <a:off x="5013960" y="1643761"/>
             <a:ext cx="2164079" cy="1202182"/>
           </a:xfrm>
           <a:prstGeom prst="roundRect">
@@ -40326,7 +41236,7 @@
         </p:nvSpPr>
         <p:spPr>
           <a:xfrm>
-            <a:off x="7330440" y="1053211"/>
+            <a:off x="7330440" y="1643761"/>
             <a:ext cx="2164080" cy="1202182"/>
           </a:xfrm>
           <a:prstGeom prst="roundRect">
@@ -40444,7 +41354,7 @@
         </p:nvSpPr>
         <p:spPr>
           <a:xfrm>
-            <a:off x="9646920" y="1053210"/>
+            <a:off x="9646920" y="1643760"/>
             <a:ext cx="2164080" cy="1202182"/>
           </a:xfrm>
           <a:prstGeom prst="roundRect">
@@ -40562,7 +41472,7 @@
         </p:nvSpPr>
         <p:spPr>
           <a:xfrm>
-            <a:off x="2583180" y="1565402"/>
+            <a:off x="2583180" y="2155952"/>
             <a:ext cx="76200" cy="177800"/>
           </a:xfrm>
           <a:prstGeom prst="rightArrow">
@@ -40633,7 +41543,7 @@
         </p:nvSpPr>
         <p:spPr>
           <a:xfrm>
-            <a:off x="4899660" y="1565402"/>
+            <a:off x="4899660" y="2155952"/>
             <a:ext cx="76200" cy="177800"/>
           </a:xfrm>
           <a:prstGeom prst="rightArrow">
@@ -40704,7 +41614,7 @@
         </p:nvSpPr>
         <p:spPr>
           <a:xfrm>
-            <a:off x="7216140" y="1565402"/>
+            <a:off x="7216140" y="2155952"/>
             <a:ext cx="76200" cy="177800"/>
           </a:xfrm>
           <a:prstGeom prst="rightArrow">
@@ -40775,7 +41685,7 @@
         </p:nvSpPr>
         <p:spPr>
           <a:xfrm>
-            <a:off x="9532620" y="1565402"/>
+            <a:off x="9532620" y="2155952"/>
             <a:ext cx="76200" cy="177800"/>
           </a:xfrm>
           <a:prstGeom prst="rightArrow">
@@ -40846,7 +41756,7 @@
         </p:nvSpPr>
         <p:spPr>
           <a:xfrm>
-            <a:off x="640080" y="2458593"/>
+            <a:off x="640080" y="3049143"/>
             <a:ext cx="10909300" cy="1350264"/>
           </a:xfrm>
           <a:prstGeom prst="rect">
@@ -42140,7 +43050,7 @@
         </p:nvGraphicFramePr>
         <p:xfrm>
           <a:off x="640080" y="1053211"/>
-          <a:ext cx="10909300" cy="1016000"/>
+          <a:ext cx="10909300" cy="1258316"/>
         </p:xfrm>
         <a:graphic>
           <a:graphicData uri="http://schemas.openxmlformats.org/drawingml/2006/table">
@@ -43096,7 +44006,7 @@
         </p:nvSpPr>
         <p:spPr>
           <a:xfrm>
-            <a:off x="640080" y="1019429"/>
+            <a:off x="640080" y="1552829"/>
             <a:ext cx="10909300" cy="3922776"/>
           </a:xfrm>
           <a:prstGeom prst="rect">
@@ -43592,7 +44502,7 @@
         </p:nvSpPr>
         <p:spPr>
           <a:xfrm>
-            <a:off x="640080" y="1053211"/>
+            <a:off x="640080" y="1592961"/>
             <a:ext cx="10909300" cy="2133600"/>
           </a:xfrm>
           <a:prstGeom prst="roundRect">
@@ -43760,7 +44670,7 @@
         </p:nvSpPr>
         <p:spPr>
           <a:xfrm>
-            <a:off x="640080" y="1053211"/>
+            <a:off x="640080" y="1592961"/>
             <a:ext cx="76200" cy="2133600"/>
           </a:xfrm>
           <a:prstGeom prst="rect">
@@ -43831,7 +44741,7 @@
         </p:nvSpPr>
         <p:spPr>
           <a:xfrm>
-            <a:off x="640080" y="3339211"/>
+            <a:off x="640080" y="3878961"/>
             <a:ext cx="10909300" cy="1222248"/>
           </a:xfrm>
           <a:prstGeom prst="rect">
@@ -44316,7 +45226,7 @@
         </p:nvGraphicFramePr>
         <p:xfrm>
           <a:off x="640080" y="2272221"/>
-          <a:ext cx="10909300" cy="1016000"/>
+          <a:ext cx="10909300" cy="1496695"/>
         </p:xfrm>
         <a:graphic>
           <a:graphicData uri="http://schemas.openxmlformats.org/drawingml/2006/table">
@@ -44953,7 +45863,7 @@
         </p:nvGraphicFramePr>
         <p:xfrm>
           <a:off x="640080" y="1053211"/>
-          <a:ext cx="10909300" cy="1270000"/>
+          <a:ext cx="10909300" cy="2288032"/>
         </p:xfrm>
         <a:graphic>
           <a:graphicData uri="http://schemas.openxmlformats.org/drawingml/2006/table">
@@ -45846,7 +46756,7 @@
         </p:nvSpPr>
         <p:spPr>
           <a:xfrm>
-            <a:off x="640080" y="1049973"/>
+            <a:off x="640080" y="1589723"/>
             <a:ext cx="10909300" cy="990600"/>
           </a:xfrm>
           <a:prstGeom prst="roundRect">
@@ -45962,7 +46872,7 @@
         </p:nvSpPr>
         <p:spPr>
           <a:xfrm>
-            <a:off x="640080" y="1049973"/>
+            <a:off x="640080" y="1589723"/>
             <a:ext cx="76200" cy="990600"/>
           </a:xfrm>
           <a:prstGeom prst="rect">
@@ -46033,7 +46943,7 @@
         </p:nvSpPr>
         <p:spPr>
           <a:xfrm>
-            <a:off x="640080" y="2192973"/>
+            <a:off x="640080" y="2732723"/>
             <a:ext cx="10909300" cy="2776728"/>
           </a:xfrm>
           <a:prstGeom prst="rect">
@@ -46329,7 +47239,7 @@
         </p:nvSpPr>
         <p:spPr>
           <a:xfrm>
-            <a:off x="640080" y="5122100"/>
+            <a:off x="640080" y="5661850"/>
             <a:ext cx="10909300" cy="356616"/>
           </a:xfrm>
           <a:prstGeom prst="rect">
@@ -46707,7 +47617,7 @@
         </p:nvGraphicFramePr>
         <p:xfrm>
           <a:off x="640080" y="3269106"/>
-          <a:ext cx="10909300" cy="762000"/>
+          <a:ext cx="10909300" cy="1182116"/>
         </p:xfrm>
         <a:graphic>
           <a:graphicData uri="http://schemas.openxmlformats.org/drawingml/2006/table">
@@ -47275,7 +48185,7 @@
         </p:nvSpPr>
         <p:spPr>
           <a:xfrm>
-            <a:off x="1005840" y="2377440"/>
+            <a:off x="1005840" y="2137898"/>
             <a:ext cx="10241280" cy="1446550"/>
           </a:xfrm>
           <a:prstGeom prst="rect">
@@ -47295,7 +48205,7 @@
               </a:lnSpc>
             </a:pPr>
             <a:r>
-              <a:rPr lang="pt-BR" sz="4400" b="1" i="0">
+              <a:rPr lang="pt-BR" sz="4400" b="1" i="0" dirty="0">
                 <a:solidFill>
                   <a:srgbClr val="FFFFFF"/>
                 </a:solidFill>
@@ -47303,7 +48213,7 @@
               </a:rPr>
               <a:t>Síntese: reprodutibilidade e uso responsável</a:t>
             </a:r>
-            <a:endParaRPr sz="4400" b="1" i="0">
+            <a:endParaRPr sz="4400" b="1" i="0" dirty="0">
               <a:solidFill>
                 <a:srgbClr val="FFFFFF"/>
               </a:solidFill>
@@ -49064,7 +49974,7 @@
         </p:nvSpPr>
         <p:spPr>
           <a:xfrm>
-            <a:off x="1005840" y="2377440"/>
+            <a:off x="967740" y="2142490"/>
             <a:ext cx="10241280" cy="1446550"/>
           </a:xfrm>
           <a:prstGeom prst="rect">
@@ -49084,7 +49994,7 @@
               </a:lnSpc>
             </a:pPr>
             <a:r>
-              <a:rPr lang="pt-BR" sz="4400" b="1" i="0">
+              <a:rPr lang="pt-BR" sz="4400" b="1" i="0" dirty="0">
                 <a:solidFill>
                   <a:srgbClr val="FFFFFF"/>
                 </a:solidFill>
@@ -49092,7 +50002,7 @@
               </a:rPr>
               <a:t>Ambiente: editores, instalação e primeiro acesso</a:t>
             </a:r>
-            <a:endParaRPr sz="4400" b="1" i="0">
+            <a:endParaRPr sz="4400" b="1" i="0" dirty="0">
               <a:solidFill>
                 <a:srgbClr val="FFFFFF"/>
               </a:solidFill>
@@ -49729,7 +50639,7 @@
         </p:nvGraphicFramePr>
         <p:xfrm>
           <a:off x="640080" y="1053211"/>
-          <a:ext cx="10909300" cy="1270000"/>
+          <a:ext cx="10909300" cy="3479927"/>
         </p:xfrm>
         <a:graphic>
           <a:graphicData uri="http://schemas.openxmlformats.org/drawingml/2006/table">
